--- a/NATS.pptx
+++ b/NATS.pptx
@@ -91,8 +91,8 @@
         </p:nvSpPr>
         <p:spPr>
           <a:xfrm>
-            <a:off x="883080" y="568440"/>
-            <a:ext cx="6425640" cy="625320"/>
+            <a:off x="457200" y="205200"/>
+            <a:ext cx="8229240" cy="858600"/>
           </a:xfrm>
           <a:prstGeom prst="rect">
             <a:avLst/>
@@ -128,8 +128,8 @@
         </p:nvSpPr>
         <p:spPr>
           <a:xfrm>
-            <a:off x="1187640" y="1505880"/>
-            <a:ext cx="6425640" cy="1354320"/>
+            <a:off x="457200" y="1203480"/>
+            <a:ext cx="8229240" cy="1422720"/>
           </a:xfrm>
           <a:prstGeom prst="rect">
             <a:avLst/>
@@ -162,8 +162,8 @@
         </p:nvSpPr>
         <p:spPr>
           <a:xfrm>
-            <a:off x="1187640" y="2989080"/>
-            <a:ext cx="6425640" cy="1354320"/>
+            <a:off x="457200" y="2761920"/>
+            <a:ext cx="8229240" cy="1422720"/>
           </a:xfrm>
           <a:prstGeom prst="rect">
             <a:avLst/>
@@ -218,8 +218,8 @@
         </p:nvSpPr>
         <p:spPr>
           <a:xfrm>
-            <a:off x="883080" y="568440"/>
-            <a:ext cx="6425640" cy="625320"/>
+            <a:off x="457200" y="205200"/>
+            <a:ext cx="8229240" cy="858600"/>
           </a:xfrm>
           <a:prstGeom prst="rect">
             <a:avLst/>
@@ -255,8 +255,8 @@
         </p:nvSpPr>
         <p:spPr>
           <a:xfrm>
-            <a:off x="1187640" y="1505880"/>
-            <a:ext cx="3135600" cy="1354320"/>
+            <a:off x="457200" y="1203480"/>
+            <a:ext cx="4015800" cy="1422720"/>
           </a:xfrm>
           <a:prstGeom prst="rect">
             <a:avLst/>
@@ -289,8 +289,8 @@
         </p:nvSpPr>
         <p:spPr>
           <a:xfrm>
-            <a:off x="4480560" y="1505880"/>
-            <a:ext cx="3135600" cy="1354320"/>
+            <a:off x="4674240" y="1203480"/>
+            <a:ext cx="4015800" cy="1422720"/>
           </a:xfrm>
           <a:prstGeom prst="rect">
             <a:avLst/>
@@ -323,8 +323,8 @@
         </p:nvSpPr>
         <p:spPr>
           <a:xfrm>
-            <a:off x="1187640" y="2989080"/>
-            <a:ext cx="3135600" cy="1354320"/>
+            <a:off x="457200" y="2761920"/>
+            <a:ext cx="4015800" cy="1422720"/>
           </a:xfrm>
           <a:prstGeom prst="rect">
             <a:avLst/>
@@ -357,8 +357,8 @@
         </p:nvSpPr>
         <p:spPr>
           <a:xfrm>
-            <a:off x="4480560" y="2989080"/>
-            <a:ext cx="3135600" cy="1354320"/>
+            <a:off x="4674240" y="2761920"/>
+            <a:ext cx="4015800" cy="1422720"/>
           </a:xfrm>
           <a:prstGeom prst="rect">
             <a:avLst/>
@@ -413,8 +413,8 @@
         </p:nvSpPr>
         <p:spPr>
           <a:xfrm>
-            <a:off x="883080" y="568440"/>
-            <a:ext cx="6425640" cy="625320"/>
+            <a:off x="457200" y="205200"/>
+            <a:ext cx="8229240" cy="858600"/>
           </a:xfrm>
           <a:prstGeom prst="rect">
             <a:avLst/>
@@ -450,8 +450,8 @@
         </p:nvSpPr>
         <p:spPr>
           <a:xfrm>
-            <a:off x="1187640" y="1505880"/>
-            <a:ext cx="2068920" cy="1354320"/>
+            <a:off x="457200" y="1203480"/>
+            <a:ext cx="2649600" cy="1422720"/>
           </a:xfrm>
           <a:prstGeom prst="rect">
             <a:avLst/>
@@ -484,8 +484,8 @@
         </p:nvSpPr>
         <p:spPr>
           <a:xfrm>
-            <a:off x="3360240" y="1505880"/>
-            <a:ext cx="2068920" cy="1354320"/>
+            <a:off x="3239640" y="1203480"/>
+            <a:ext cx="2649600" cy="1422720"/>
           </a:xfrm>
           <a:prstGeom prst="rect">
             <a:avLst/>
@@ -518,8 +518,8 @@
         </p:nvSpPr>
         <p:spPr>
           <a:xfrm>
-            <a:off x="5533200" y="1505880"/>
-            <a:ext cx="2068920" cy="1354320"/>
+            <a:off x="6022080" y="1203480"/>
+            <a:ext cx="2649600" cy="1422720"/>
           </a:xfrm>
           <a:prstGeom prst="rect">
             <a:avLst/>
@@ -552,8 +552,8 @@
         </p:nvSpPr>
         <p:spPr>
           <a:xfrm>
-            <a:off x="1187640" y="2989080"/>
-            <a:ext cx="2068920" cy="1354320"/>
+            <a:off x="457200" y="2761920"/>
+            <a:ext cx="2649600" cy="1422720"/>
           </a:xfrm>
           <a:prstGeom prst="rect">
             <a:avLst/>
@@ -586,8 +586,8 @@
         </p:nvSpPr>
         <p:spPr>
           <a:xfrm>
-            <a:off x="3360240" y="2989080"/>
-            <a:ext cx="2068920" cy="1354320"/>
+            <a:off x="3239640" y="2761920"/>
+            <a:ext cx="2649600" cy="1422720"/>
           </a:xfrm>
           <a:prstGeom prst="rect">
             <a:avLst/>
@@ -620,8 +620,8 @@
         </p:nvSpPr>
         <p:spPr>
           <a:xfrm>
-            <a:off x="5533200" y="2989080"/>
-            <a:ext cx="2068920" cy="1354320"/>
+            <a:off x="6022080" y="2761920"/>
+            <a:ext cx="2649600" cy="1422720"/>
           </a:xfrm>
           <a:prstGeom prst="rect">
             <a:avLst/>
@@ -678,7 +678,7 @@
         <p:txBody>
           <a:bodyPr/>
           <a:p>
-            <a:fld id="{A884B8DA-C22F-4699-BDA9-413617C397FB}" type="slidenum">
+            <a:fld id="{49A4F23F-5D0D-4B6E-BA7C-690581EBB5ED}" type="slidenum">
               <a:t>&lt;#&gt;</a:t>
             </a:fld>
           </a:p>
@@ -718,8 +718,8 @@
         </p:nvSpPr>
         <p:spPr>
           <a:xfrm>
-            <a:off x="883080" y="568440"/>
-            <a:ext cx="6425640" cy="625320"/>
+            <a:off x="457200" y="205200"/>
+            <a:ext cx="8229240" cy="858600"/>
           </a:xfrm>
           <a:prstGeom prst="rect">
             <a:avLst/>
@@ -755,8 +755,8 @@
         </p:nvSpPr>
         <p:spPr>
           <a:xfrm>
-            <a:off x="1187640" y="1505880"/>
-            <a:ext cx="6425640" cy="2839680"/>
+            <a:off x="457200" y="1203480"/>
+            <a:ext cx="8229240" cy="2982960"/>
           </a:xfrm>
           <a:prstGeom prst="rect">
             <a:avLst/>
@@ -794,7 +794,7 @@
         <p:txBody>
           <a:bodyPr/>
           <a:p>
-            <a:fld id="{B442D867-5D45-4005-A6CC-DCC61D6F7AE2}" type="slidenum">
+            <a:fld id="{3C14C2DD-4AA6-4CDF-9A9A-5AF4B1BE6CD3}" type="slidenum">
               <a:t>&lt;#&gt;</a:t>
             </a:fld>
           </a:p>
@@ -834,8 +834,8 @@
         </p:nvSpPr>
         <p:spPr>
           <a:xfrm>
-            <a:off x="883080" y="568440"/>
-            <a:ext cx="6425640" cy="625320"/>
+            <a:off x="457200" y="205200"/>
+            <a:ext cx="8229240" cy="858600"/>
           </a:xfrm>
           <a:prstGeom prst="rect">
             <a:avLst/>
@@ -871,8 +871,8 @@
         </p:nvSpPr>
         <p:spPr>
           <a:xfrm>
-            <a:off x="1187640" y="1505880"/>
-            <a:ext cx="6425640" cy="2839680"/>
+            <a:off x="457200" y="1203480"/>
+            <a:ext cx="8229240" cy="2982960"/>
           </a:xfrm>
           <a:prstGeom prst="rect">
             <a:avLst/>
@@ -907,7 +907,7 @@
         <p:txBody>
           <a:bodyPr/>
           <a:p>
-            <a:fld id="{7482C896-B6C3-4826-A8B0-FD50E19538C7}" type="slidenum">
+            <a:fld id="{B49B3E90-6744-4524-A626-48F1A723DA6C}" type="slidenum">
               <a:t>&lt;#&gt;</a:t>
             </a:fld>
           </a:p>
@@ -947,8 +947,8 @@
         </p:nvSpPr>
         <p:spPr>
           <a:xfrm>
-            <a:off x="883080" y="568440"/>
-            <a:ext cx="6425640" cy="625320"/>
+            <a:off x="457200" y="205200"/>
+            <a:ext cx="8229240" cy="858600"/>
           </a:xfrm>
           <a:prstGeom prst="rect">
             <a:avLst/>
@@ -984,8 +984,8 @@
         </p:nvSpPr>
         <p:spPr>
           <a:xfrm>
-            <a:off x="1187640" y="1505880"/>
-            <a:ext cx="3135600" cy="2839680"/>
+            <a:off x="457200" y="1203480"/>
+            <a:ext cx="4015800" cy="2982960"/>
           </a:xfrm>
           <a:prstGeom prst="rect">
             <a:avLst/>
@@ -1018,8 +1018,8 @@
         </p:nvSpPr>
         <p:spPr>
           <a:xfrm>
-            <a:off x="4480560" y="1505880"/>
-            <a:ext cx="3135600" cy="2839680"/>
+            <a:off x="4674240" y="1203480"/>
+            <a:ext cx="4015800" cy="2982960"/>
           </a:xfrm>
           <a:prstGeom prst="rect">
             <a:avLst/>
@@ -1054,7 +1054,7 @@
         <p:txBody>
           <a:bodyPr/>
           <a:p>
-            <a:fld id="{5B7B1AA0-9CBD-4667-908B-48C3F9DDE897}" type="slidenum">
+            <a:fld id="{64EADEFC-10AD-4E56-9924-91487CFF147A}" type="slidenum">
               <a:t>&lt;#&gt;</a:t>
             </a:fld>
           </a:p>
@@ -1094,8 +1094,8 @@
         </p:nvSpPr>
         <p:spPr>
           <a:xfrm>
-            <a:off x="883080" y="568440"/>
-            <a:ext cx="6425640" cy="625320"/>
+            <a:off x="457200" y="205200"/>
+            <a:ext cx="8229240" cy="858600"/>
           </a:xfrm>
           <a:prstGeom prst="rect">
             <a:avLst/>
@@ -1133,7 +1133,7 @@
         <p:txBody>
           <a:bodyPr/>
           <a:p>
-            <a:fld id="{EC0C96BF-2FB0-4AB5-A549-730BC9BD0CC4}" type="slidenum">
+            <a:fld id="{2387F592-D166-445B-8721-0C6AD4B09D20}" type="slidenum">
               <a:t>&lt;#&gt;</a:t>
             </a:fld>
           </a:p>
@@ -1173,8 +1173,8 @@
         </p:nvSpPr>
         <p:spPr>
           <a:xfrm>
-            <a:off x="883080" y="683280"/>
-            <a:ext cx="6425640" cy="1835280"/>
+            <a:off x="457200" y="205200"/>
+            <a:ext cx="8229240" cy="3981240"/>
           </a:xfrm>
           <a:prstGeom prst="rect">
             <a:avLst/>
@@ -1212,7 +1212,7 @@
         <p:txBody>
           <a:bodyPr/>
           <a:p>
-            <a:fld id="{6BE0234D-CD94-4C3E-AAFE-FED422CD1B85}" type="slidenum">
+            <a:fld id="{34329418-4871-4F6B-8099-4CAFF8732590}" type="slidenum">
               <a:t>&lt;#&gt;</a:t>
             </a:fld>
           </a:p>
@@ -1252,8 +1252,8 @@
         </p:nvSpPr>
         <p:spPr>
           <a:xfrm>
-            <a:off x="883080" y="568440"/>
-            <a:ext cx="6425640" cy="625320"/>
+            <a:off x="457200" y="205200"/>
+            <a:ext cx="8229240" cy="858600"/>
           </a:xfrm>
           <a:prstGeom prst="rect">
             <a:avLst/>
@@ -1289,8 +1289,8 @@
         </p:nvSpPr>
         <p:spPr>
           <a:xfrm>
-            <a:off x="1187640" y="1505880"/>
-            <a:ext cx="3135600" cy="1354320"/>
+            <a:off x="457200" y="1203480"/>
+            <a:ext cx="4015800" cy="1422720"/>
           </a:xfrm>
           <a:prstGeom prst="rect">
             <a:avLst/>
@@ -1323,8 +1323,8 @@
         </p:nvSpPr>
         <p:spPr>
           <a:xfrm>
-            <a:off x="4480560" y="1505880"/>
-            <a:ext cx="3135600" cy="2839680"/>
+            <a:off x="4674240" y="1203480"/>
+            <a:ext cx="4015800" cy="2982960"/>
           </a:xfrm>
           <a:prstGeom prst="rect">
             <a:avLst/>
@@ -1357,8 +1357,8 @@
         </p:nvSpPr>
         <p:spPr>
           <a:xfrm>
-            <a:off x="1187640" y="2989080"/>
-            <a:ext cx="3135600" cy="1354320"/>
+            <a:off x="457200" y="2761920"/>
+            <a:ext cx="4015800" cy="1422720"/>
           </a:xfrm>
           <a:prstGeom prst="rect">
             <a:avLst/>
@@ -1393,7 +1393,7 @@
         <p:txBody>
           <a:bodyPr/>
           <a:p>
-            <a:fld id="{2D3C6FE1-7F62-44F8-948D-792F96D4DA74}" type="slidenum">
+            <a:fld id="{594F9734-EA9A-4819-A980-E91BC2A69737}" type="slidenum">
               <a:t>&lt;#&gt;</a:t>
             </a:fld>
           </a:p>
@@ -1433,8 +1433,8 @@
         </p:nvSpPr>
         <p:spPr>
           <a:xfrm>
-            <a:off x="883080" y="568440"/>
-            <a:ext cx="6425640" cy="625320"/>
+            <a:off x="457200" y="205200"/>
+            <a:ext cx="8229240" cy="858600"/>
           </a:xfrm>
           <a:prstGeom prst="rect">
             <a:avLst/>
@@ -1470,8 +1470,8 @@
         </p:nvSpPr>
         <p:spPr>
           <a:xfrm>
-            <a:off x="1187640" y="1505880"/>
-            <a:ext cx="6425640" cy="2839680"/>
+            <a:off x="457200" y="1203480"/>
+            <a:ext cx="8229240" cy="2982960"/>
           </a:xfrm>
           <a:prstGeom prst="rect">
             <a:avLst/>
@@ -1529,8 +1529,8 @@
         </p:nvSpPr>
         <p:spPr>
           <a:xfrm>
-            <a:off x="883080" y="568440"/>
-            <a:ext cx="6425640" cy="625320"/>
+            <a:off x="457200" y="205200"/>
+            <a:ext cx="8229240" cy="858600"/>
           </a:xfrm>
           <a:prstGeom prst="rect">
             <a:avLst/>
@@ -1566,8 +1566,8 @@
         </p:nvSpPr>
         <p:spPr>
           <a:xfrm>
-            <a:off x="1187640" y="1505880"/>
-            <a:ext cx="3135600" cy="2839680"/>
+            <a:off x="457200" y="1203480"/>
+            <a:ext cx="4015800" cy="2982960"/>
           </a:xfrm>
           <a:prstGeom prst="rect">
             <a:avLst/>
@@ -1600,8 +1600,8 @@
         </p:nvSpPr>
         <p:spPr>
           <a:xfrm>
-            <a:off x="4480560" y="1505880"/>
-            <a:ext cx="3135600" cy="1354320"/>
+            <a:off x="4674240" y="1203480"/>
+            <a:ext cx="4015800" cy="1422720"/>
           </a:xfrm>
           <a:prstGeom prst="rect">
             <a:avLst/>
@@ -1634,8 +1634,8 @@
         </p:nvSpPr>
         <p:spPr>
           <a:xfrm>
-            <a:off x="4480560" y="2989080"/>
-            <a:ext cx="3135600" cy="1354320"/>
+            <a:off x="4674240" y="2761920"/>
+            <a:ext cx="4015800" cy="1422720"/>
           </a:xfrm>
           <a:prstGeom prst="rect">
             <a:avLst/>
@@ -1670,7 +1670,7 @@
         <p:txBody>
           <a:bodyPr/>
           <a:p>
-            <a:fld id="{FA7D2278-3E76-44A2-9295-4D81CDDE5302}" type="slidenum">
+            <a:fld id="{8658C3F1-9F20-42AB-A330-F3F2ED0993DC}" type="slidenum">
               <a:t>&lt;#&gt;</a:t>
             </a:fld>
           </a:p>
@@ -1710,8 +1710,8 @@
         </p:nvSpPr>
         <p:spPr>
           <a:xfrm>
-            <a:off x="883080" y="568440"/>
-            <a:ext cx="6425640" cy="625320"/>
+            <a:off x="457200" y="205200"/>
+            <a:ext cx="8229240" cy="858600"/>
           </a:xfrm>
           <a:prstGeom prst="rect">
             <a:avLst/>
@@ -1747,8 +1747,8 @@
         </p:nvSpPr>
         <p:spPr>
           <a:xfrm>
-            <a:off x="1187640" y="1505880"/>
-            <a:ext cx="3135600" cy="1354320"/>
+            <a:off x="457200" y="1203480"/>
+            <a:ext cx="4015800" cy="1422720"/>
           </a:xfrm>
           <a:prstGeom prst="rect">
             <a:avLst/>
@@ -1781,8 +1781,8 @@
         </p:nvSpPr>
         <p:spPr>
           <a:xfrm>
-            <a:off x="4480560" y="1505880"/>
-            <a:ext cx="3135600" cy="1354320"/>
+            <a:off x="4674240" y="1203480"/>
+            <a:ext cx="4015800" cy="1422720"/>
           </a:xfrm>
           <a:prstGeom prst="rect">
             <a:avLst/>
@@ -1815,8 +1815,8 @@
         </p:nvSpPr>
         <p:spPr>
           <a:xfrm>
-            <a:off x="1187640" y="2989080"/>
-            <a:ext cx="6425640" cy="1354320"/>
+            <a:off x="457200" y="2761920"/>
+            <a:ext cx="8229240" cy="1422720"/>
           </a:xfrm>
           <a:prstGeom prst="rect">
             <a:avLst/>
@@ -1851,7 +1851,7 @@
         <p:txBody>
           <a:bodyPr/>
           <a:p>
-            <a:fld id="{A9CEA4E5-456B-412E-91CD-3C088EB676A2}" type="slidenum">
+            <a:fld id="{E26D0968-0884-49E5-A304-E08671ADE82A}" type="slidenum">
               <a:t>&lt;#&gt;</a:t>
             </a:fld>
           </a:p>
@@ -1891,8 +1891,8 @@
         </p:nvSpPr>
         <p:spPr>
           <a:xfrm>
-            <a:off x="883080" y="568440"/>
-            <a:ext cx="6425640" cy="625320"/>
+            <a:off x="457200" y="205200"/>
+            <a:ext cx="8229240" cy="858600"/>
           </a:xfrm>
           <a:prstGeom prst="rect">
             <a:avLst/>
@@ -1928,8 +1928,8 @@
         </p:nvSpPr>
         <p:spPr>
           <a:xfrm>
-            <a:off x="1187640" y="1505880"/>
-            <a:ext cx="6425640" cy="1354320"/>
+            <a:off x="457200" y="1203480"/>
+            <a:ext cx="8229240" cy="1422720"/>
           </a:xfrm>
           <a:prstGeom prst="rect">
             <a:avLst/>
@@ -1962,8 +1962,8 @@
         </p:nvSpPr>
         <p:spPr>
           <a:xfrm>
-            <a:off x="1187640" y="2989080"/>
-            <a:ext cx="6425640" cy="1354320"/>
+            <a:off x="457200" y="2761920"/>
+            <a:ext cx="8229240" cy="1422720"/>
           </a:xfrm>
           <a:prstGeom prst="rect">
             <a:avLst/>
@@ -1998,7 +1998,7 @@
         <p:txBody>
           <a:bodyPr/>
           <a:p>
-            <a:fld id="{67332069-3F4C-4ACC-AE83-3B6BBE495ECF}" type="slidenum">
+            <a:fld id="{6247214F-5BAC-4422-B50D-597D7A78A6D7}" type="slidenum">
               <a:t>&lt;#&gt;</a:t>
             </a:fld>
           </a:p>
@@ -2038,8 +2038,8 @@
         </p:nvSpPr>
         <p:spPr>
           <a:xfrm>
-            <a:off x="883080" y="568440"/>
-            <a:ext cx="6425640" cy="625320"/>
+            <a:off x="457200" y="205200"/>
+            <a:ext cx="8229240" cy="858600"/>
           </a:xfrm>
           <a:prstGeom prst="rect">
             <a:avLst/>
@@ -2075,8 +2075,8 @@
         </p:nvSpPr>
         <p:spPr>
           <a:xfrm>
-            <a:off x="1187640" y="1505880"/>
-            <a:ext cx="3135600" cy="1354320"/>
+            <a:off x="457200" y="1203480"/>
+            <a:ext cx="4015800" cy="1422720"/>
           </a:xfrm>
           <a:prstGeom prst="rect">
             <a:avLst/>
@@ -2109,8 +2109,8 @@
         </p:nvSpPr>
         <p:spPr>
           <a:xfrm>
-            <a:off x="4480560" y="1505880"/>
-            <a:ext cx="3135600" cy="1354320"/>
+            <a:off x="4674240" y="1203480"/>
+            <a:ext cx="4015800" cy="1422720"/>
           </a:xfrm>
           <a:prstGeom prst="rect">
             <a:avLst/>
@@ -2143,8 +2143,8 @@
         </p:nvSpPr>
         <p:spPr>
           <a:xfrm>
-            <a:off x="1187640" y="2989080"/>
-            <a:ext cx="3135600" cy="1354320"/>
+            <a:off x="457200" y="2761920"/>
+            <a:ext cx="4015800" cy="1422720"/>
           </a:xfrm>
           <a:prstGeom prst="rect">
             <a:avLst/>
@@ -2177,8 +2177,8 @@
         </p:nvSpPr>
         <p:spPr>
           <a:xfrm>
-            <a:off x="4480560" y="2989080"/>
-            <a:ext cx="3135600" cy="1354320"/>
+            <a:off x="4674240" y="2761920"/>
+            <a:ext cx="4015800" cy="1422720"/>
           </a:xfrm>
           <a:prstGeom prst="rect">
             <a:avLst/>
@@ -2213,7 +2213,7 @@
         <p:txBody>
           <a:bodyPr/>
           <a:p>
-            <a:fld id="{E38B2349-17D4-4AA8-9D9A-17A9F6A23AD9}" type="slidenum">
+            <a:fld id="{FDC59FD8-20B0-458F-AB5D-3908262A3166}" type="slidenum">
               <a:t>&lt;#&gt;</a:t>
             </a:fld>
           </a:p>
@@ -2253,8 +2253,8 @@
         </p:nvSpPr>
         <p:spPr>
           <a:xfrm>
-            <a:off x="883080" y="568440"/>
-            <a:ext cx="6425640" cy="625320"/>
+            <a:off x="457200" y="205200"/>
+            <a:ext cx="8229240" cy="858600"/>
           </a:xfrm>
           <a:prstGeom prst="rect">
             <a:avLst/>
@@ -2290,8 +2290,8 @@
         </p:nvSpPr>
         <p:spPr>
           <a:xfrm>
-            <a:off x="1187640" y="1505880"/>
-            <a:ext cx="2068920" cy="1354320"/>
+            <a:off x="457200" y="1203480"/>
+            <a:ext cx="2649600" cy="1422720"/>
           </a:xfrm>
           <a:prstGeom prst="rect">
             <a:avLst/>
@@ -2324,8 +2324,8 @@
         </p:nvSpPr>
         <p:spPr>
           <a:xfrm>
-            <a:off x="3360240" y="1505880"/>
-            <a:ext cx="2068920" cy="1354320"/>
+            <a:off x="3239640" y="1203480"/>
+            <a:ext cx="2649600" cy="1422720"/>
           </a:xfrm>
           <a:prstGeom prst="rect">
             <a:avLst/>
@@ -2358,8 +2358,8 @@
         </p:nvSpPr>
         <p:spPr>
           <a:xfrm>
-            <a:off x="5533200" y="1505880"/>
-            <a:ext cx="2068920" cy="1354320"/>
+            <a:off x="6022080" y="1203480"/>
+            <a:ext cx="2649600" cy="1422720"/>
           </a:xfrm>
           <a:prstGeom prst="rect">
             <a:avLst/>
@@ -2392,8 +2392,8 @@
         </p:nvSpPr>
         <p:spPr>
           <a:xfrm>
-            <a:off x="1187640" y="2989080"/>
-            <a:ext cx="2068920" cy="1354320"/>
+            <a:off x="457200" y="2761920"/>
+            <a:ext cx="2649600" cy="1422720"/>
           </a:xfrm>
           <a:prstGeom prst="rect">
             <a:avLst/>
@@ -2426,8 +2426,8 @@
         </p:nvSpPr>
         <p:spPr>
           <a:xfrm>
-            <a:off x="3360240" y="2989080"/>
-            <a:ext cx="2068920" cy="1354320"/>
+            <a:off x="3239640" y="2761920"/>
+            <a:ext cx="2649600" cy="1422720"/>
           </a:xfrm>
           <a:prstGeom prst="rect">
             <a:avLst/>
@@ -2460,8 +2460,8 @@
         </p:nvSpPr>
         <p:spPr>
           <a:xfrm>
-            <a:off x="5533200" y="2989080"/>
-            <a:ext cx="2068920" cy="1354320"/>
+            <a:off x="6022080" y="2761920"/>
+            <a:ext cx="2649600" cy="1422720"/>
           </a:xfrm>
           <a:prstGeom prst="rect">
             <a:avLst/>
@@ -2496,7 +2496,7 @@
         <p:txBody>
           <a:bodyPr/>
           <a:p>
-            <a:fld id="{DC63756F-1D27-42F8-B30B-398D44A83463}" type="slidenum">
+            <a:fld id="{1ABF94EE-30E2-4AC6-B1E2-6702434334B4}" type="slidenum">
               <a:t>&lt;#&gt;</a:t>
             </a:fld>
           </a:p>
@@ -2536,8 +2536,8 @@
         </p:nvSpPr>
         <p:spPr>
           <a:xfrm>
-            <a:off x="883080" y="568440"/>
-            <a:ext cx="6425640" cy="625320"/>
+            <a:off x="457200" y="205200"/>
+            <a:ext cx="8229240" cy="858600"/>
           </a:xfrm>
           <a:prstGeom prst="rect">
             <a:avLst/>
@@ -2573,8 +2573,8 @@
         </p:nvSpPr>
         <p:spPr>
           <a:xfrm>
-            <a:off x="1187640" y="1505880"/>
-            <a:ext cx="6425640" cy="2839680"/>
+            <a:off x="457200" y="1203480"/>
+            <a:ext cx="8229240" cy="2982960"/>
           </a:xfrm>
           <a:prstGeom prst="rect">
             <a:avLst/>
@@ -2629,8 +2629,8 @@
         </p:nvSpPr>
         <p:spPr>
           <a:xfrm>
-            <a:off x="883080" y="568440"/>
-            <a:ext cx="6425640" cy="625320"/>
+            <a:off x="457200" y="205200"/>
+            <a:ext cx="8229240" cy="858600"/>
           </a:xfrm>
           <a:prstGeom prst="rect">
             <a:avLst/>
@@ -2666,8 +2666,8 @@
         </p:nvSpPr>
         <p:spPr>
           <a:xfrm>
-            <a:off x="1187640" y="1505880"/>
-            <a:ext cx="3135600" cy="2839680"/>
+            <a:off x="457200" y="1203480"/>
+            <a:ext cx="4015800" cy="2982960"/>
           </a:xfrm>
           <a:prstGeom prst="rect">
             <a:avLst/>
@@ -2700,8 +2700,8 @@
         </p:nvSpPr>
         <p:spPr>
           <a:xfrm>
-            <a:off x="4480560" y="1505880"/>
-            <a:ext cx="3135600" cy="2839680"/>
+            <a:off x="4674240" y="1203480"/>
+            <a:ext cx="4015800" cy="2982960"/>
           </a:xfrm>
           <a:prstGeom prst="rect">
             <a:avLst/>
@@ -2756,8 +2756,8 @@
         </p:nvSpPr>
         <p:spPr>
           <a:xfrm>
-            <a:off x="883080" y="568440"/>
-            <a:ext cx="6425640" cy="625320"/>
+            <a:off x="457200" y="205200"/>
+            <a:ext cx="8229240" cy="858600"/>
           </a:xfrm>
           <a:prstGeom prst="rect">
             <a:avLst/>
@@ -2815,8 +2815,8 @@
         </p:nvSpPr>
         <p:spPr>
           <a:xfrm>
-            <a:off x="883080" y="683280"/>
-            <a:ext cx="6425640" cy="1835280"/>
+            <a:off x="457200" y="205200"/>
+            <a:ext cx="8229240" cy="3981240"/>
           </a:xfrm>
           <a:prstGeom prst="rect">
             <a:avLst/>
@@ -2874,8 +2874,8 @@
         </p:nvSpPr>
         <p:spPr>
           <a:xfrm>
-            <a:off x="883080" y="568440"/>
-            <a:ext cx="6425640" cy="625320"/>
+            <a:off x="457200" y="205200"/>
+            <a:ext cx="8229240" cy="858600"/>
           </a:xfrm>
           <a:prstGeom prst="rect">
             <a:avLst/>
@@ -2911,8 +2911,8 @@
         </p:nvSpPr>
         <p:spPr>
           <a:xfrm>
-            <a:off x="1187640" y="1505880"/>
-            <a:ext cx="3135600" cy="1354320"/>
+            <a:off x="457200" y="1203480"/>
+            <a:ext cx="4015800" cy="1422720"/>
           </a:xfrm>
           <a:prstGeom prst="rect">
             <a:avLst/>
@@ -2945,8 +2945,8 @@
         </p:nvSpPr>
         <p:spPr>
           <a:xfrm>
-            <a:off x="4480560" y="1505880"/>
-            <a:ext cx="3135600" cy="2839680"/>
+            <a:off x="4674240" y="1203480"/>
+            <a:ext cx="4015800" cy="2982960"/>
           </a:xfrm>
           <a:prstGeom prst="rect">
             <a:avLst/>
@@ -2979,8 +2979,8 @@
         </p:nvSpPr>
         <p:spPr>
           <a:xfrm>
-            <a:off x="1187640" y="2989080"/>
-            <a:ext cx="3135600" cy="1354320"/>
+            <a:off x="457200" y="2761920"/>
+            <a:ext cx="4015800" cy="1422720"/>
           </a:xfrm>
           <a:prstGeom prst="rect">
             <a:avLst/>
@@ -3035,8 +3035,8 @@
         </p:nvSpPr>
         <p:spPr>
           <a:xfrm>
-            <a:off x="883080" y="568440"/>
-            <a:ext cx="6425640" cy="625320"/>
+            <a:off x="457200" y="205200"/>
+            <a:ext cx="8229240" cy="858600"/>
           </a:xfrm>
           <a:prstGeom prst="rect">
             <a:avLst/>
@@ -3072,8 +3072,8 @@
         </p:nvSpPr>
         <p:spPr>
           <a:xfrm>
-            <a:off x="1187640" y="1505880"/>
-            <a:ext cx="3135600" cy="2839680"/>
+            <a:off x="457200" y="1203480"/>
+            <a:ext cx="4015800" cy="2982960"/>
           </a:xfrm>
           <a:prstGeom prst="rect">
             <a:avLst/>
@@ -3106,8 +3106,8 @@
         </p:nvSpPr>
         <p:spPr>
           <a:xfrm>
-            <a:off x="4480560" y="1505880"/>
-            <a:ext cx="3135600" cy="1354320"/>
+            <a:off x="4674240" y="1203480"/>
+            <a:ext cx="4015800" cy="1422720"/>
           </a:xfrm>
           <a:prstGeom prst="rect">
             <a:avLst/>
@@ -3140,8 +3140,8 @@
         </p:nvSpPr>
         <p:spPr>
           <a:xfrm>
-            <a:off x="4480560" y="2989080"/>
-            <a:ext cx="3135600" cy="1354320"/>
+            <a:off x="4674240" y="2761920"/>
+            <a:ext cx="4015800" cy="1422720"/>
           </a:xfrm>
           <a:prstGeom prst="rect">
             <a:avLst/>
@@ -3196,8 +3196,8 @@
         </p:nvSpPr>
         <p:spPr>
           <a:xfrm>
-            <a:off x="883080" y="568440"/>
-            <a:ext cx="6425640" cy="625320"/>
+            <a:off x="457200" y="205200"/>
+            <a:ext cx="8229240" cy="858600"/>
           </a:xfrm>
           <a:prstGeom prst="rect">
             <a:avLst/>
@@ -3233,8 +3233,8 @@
         </p:nvSpPr>
         <p:spPr>
           <a:xfrm>
-            <a:off x="1187640" y="1505880"/>
-            <a:ext cx="3135600" cy="1354320"/>
+            <a:off x="457200" y="1203480"/>
+            <a:ext cx="4015800" cy="1422720"/>
           </a:xfrm>
           <a:prstGeom prst="rect">
             <a:avLst/>
@@ -3267,8 +3267,8 @@
         </p:nvSpPr>
         <p:spPr>
           <a:xfrm>
-            <a:off x="4480560" y="1505880"/>
-            <a:ext cx="3135600" cy="1354320"/>
+            <a:off x="4674240" y="1203480"/>
+            <a:ext cx="4015800" cy="1422720"/>
           </a:xfrm>
           <a:prstGeom prst="rect">
             <a:avLst/>
@@ -3301,8 +3301,8 @@
         </p:nvSpPr>
         <p:spPr>
           <a:xfrm>
-            <a:off x="1187640" y="2989080"/>
-            <a:ext cx="6425640" cy="1354320"/>
+            <a:off x="457200" y="2761920"/>
+            <a:ext cx="8229240" cy="1422720"/>
           </a:xfrm>
           <a:prstGeom prst="rect">
             <a:avLst/>
@@ -3361,7 +3361,7 @@
         <p:spPr>
           <a:xfrm>
             <a:off x="781920" y="777600"/>
-            <a:ext cx="7578720" cy="3863880"/>
+            <a:ext cx="7578360" cy="3863520"/>
           </a:xfrm>
           <a:custGeom>
             <a:avLst/>
@@ -3445,7 +3445,7 @@
         <p:spPr>
           <a:xfrm>
             <a:off x="793800" y="559800"/>
-            <a:ext cx="7398360" cy="3909960"/>
+            <a:ext cx="7398000" cy="3909600"/>
           </a:xfrm>
           <a:custGeom>
             <a:avLst/>
@@ -3663,7 +3663,7 @@
         <p:spPr>
           <a:xfrm>
             <a:off x="7459920" y="542160"/>
-            <a:ext cx="813600" cy="1021680"/>
+            <a:ext cx="813240" cy="1021320"/>
           </a:xfrm>
           <a:custGeom>
             <a:avLst/>
@@ -3762,7 +3762,7 @@
         <p:spPr>
           <a:xfrm>
             <a:off x="8121600" y="820800"/>
-            <a:ext cx="185040" cy="334800"/>
+            <a:ext cx="184680" cy="334440"/>
           </a:xfrm>
           <a:custGeom>
             <a:avLst/>
@@ -3821,7 +3821,7 @@
         <p:spPr>
           <a:xfrm>
             <a:off x="2947680" y="505080"/>
-            <a:ext cx="830520" cy="95400"/>
+            <a:ext cx="830160" cy="95040"/>
           </a:xfrm>
           <a:custGeom>
             <a:avLst/>
@@ -3880,7 +3880,7 @@
         <p:spPr>
           <a:xfrm>
             <a:off x="3867840" y="487080"/>
-            <a:ext cx="277560" cy="42480"/>
+            <a:ext cx="277200" cy="42120"/>
           </a:xfrm>
           <a:custGeom>
             <a:avLst/>
@@ -3939,7 +3939,7 @@
         <p:spPr>
           <a:xfrm>
             <a:off x="3549240" y="4514400"/>
-            <a:ext cx="879840" cy="46440"/>
+            <a:ext cx="879480" cy="46080"/>
           </a:xfrm>
           <a:custGeom>
             <a:avLst/>
@@ -4004,7 +4004,7 @@
         <p:spPr>
           <a:xfrm>
             <a:off x="3925080" y="4620600"/>
-            <a:ext cx="284760" cy="34560"/>
+            <a:ext cx="284400" cy="34200"/>
           </a:xfrm>
           <a:custGeom>
             <a:avLst/>
@@ -4062,8 +4062,8 @@
         </p:nvSpPr>
         <p:spPr>
           <a:xfrm rot="20728200">
-            <a:off x="593640" y="662400"/>
-            <a:ext cx="1234080" cy="1389960"/>
+            <a:off x="593280" y="662400"/>
+            <a:ext cx="1233720" cy="1389600"/>
           </a:xfrm>
           <a:custGeom>
             <a:avLst/>
@@ -4726,8 +4726,8 @@
         </p:nvSpPr>
         <p:spPr>
           <a:xfrm rot="16200000">
-            <a:off x="545400" y="3237840"/>
-            <a:ext cx="539640" cy="263520"/>
+            <a:off x="545400" y="3238200"/>
+            <a:ext cx="539280" cy="263160"/>
           </a:xfrm>
           <a:custGeom>
             <a:avLst/>
@@ -4855,7 +4855,7 @@
         <p:spPr>
           <a:xfrm rot="1735200">
             <a:off x="7949520" y="3937320"/>
-            <a:ext cx="210960" cy="267480"/>
+            <a:ext cx="210600" cy="267120"/>
           </a:xfrm>
           <a:custGeom>
             <a:avLst/>
@@ -4957,8 +4957,8 @@
         </p:nvSpPr>
         <p:spPr>
           <a:xfrm>
-            <a:off x="883080" y="683280"/>
-            <a:ext cx="6425640" cy="395640"/>
+            <a:off x="883080" y="568440"/>
+            <a:ext cx="6425280" cy="624960"/>
           </a:xfrm>
           <a:prstGeom prst="rect">
             <a:avLst/>
@@ -5039,8 +5039,8 @@
         </p:nvSpPr>
         <p:spPr>
           <a:xfrm>
-            <a:off x="457200" y="1203480"/>
-            <a:ext cx="8229240" cy="2982960"/>
+            <a:off x="1187640" y="1505880"/>
+            <a:ext cx="6425280" cy="2839320"/>
           </a:xfrm>
           <a:prstGeom prst="rect">
             <a:avLst/>
@@ -5067,18 +5067,12 @@
               <a:buChar char=""/>
             </a:pPr>
             <a:r>
-              <a:rPr b="0" lang="en-US" sz="3200" spc="-1" strike="noStrike">
+              <a:rPr b="0" lang="en-US" sz="1800" spc="-1" strike="noStrike">
                 <a:latin typeface="Arial"/>
               </a:rPr>
-              <a:t>Click to edit the outline text </a:t>
+              <a:t>Click to edit the outline text format</a:t>
             </a:r>
-            <a:r>
-              <a:rPr b="0" lang="en-US" sz="3200" spc="-1" strike="noStrike">
-                <a:latin typeface="Arial"/>
-              </a:rPr>
-              <a:t>format</a:t>
-            </a:r>
-            <a:endParaRPr b="0" lang="en-US" sz="3200" spc="-1" strike="noStrike">
+            <a:endParaRPr b="0" lang="en-US" sz="1800" spc="-1" strike="noStrike">
               <a:latin typeface="Arial"/>
             </a:endParaRPr>
           </a:p>
@@ -5095,12 +5089,12 @@
               <a:buChar char=""/>
             </a:pPr>
             <a:r>
-              <a:rPr b="0" lang="en-US" sz="2800" spc="-1" strike="noStrike">
+              <a:rPr b="0" lang="en-US" sz="1800" spc="-1" strike="noStrike">
                 <a:latin typeface="Arial"/>
               </a:rPr>
               <a:t>Second Outline Level</a:t>
             </a:r>
-            <a:endParaRPr b="0" lang="en-US" sz="2800" spc="-1" strike="noStrike">
+            <a:endParaRPr b="0" lang="en-US" sz="1800" spc="-1" strike="noStrike">
               <a:latin typeface="Arial"/>
             </a:endParaRPr>
           </a:p>
@@ -5117,12 +5111,12 @@
               <a:buChar char=""/>
             </a:pPr>
             <a:r>
-              <a:rPr b="0" lang="en-US" sz="2400" spc="-1" strike="noStrike">
+              <a:rPr b="0" lang="en-US" sz="1800" spc="-1" strike="noStrike">
                 <a:latin typeface="Arial"/>
               </a:rPr>
               <a:t>Third Outline Level</a:t>
             </a:r>
-            <a:endParaRPr b="0" lang="en-US" sz="2400" spc="-1" strike="noStrike">
+            <a:endParaRPr b="0" lang="en-US" sz="1800" spc="-1" strike="noStrike">
               <a:latin typeface="Arial"/>
             </a:endParaRPr>
           </a:p>
@@ -5139,12 +5133,12 @@
               <a:buChar char=""/>
             </a:pPr>
             <a:r>
-              <a:rPr b="0" lang="en-US" sz="2000" spc="-1" strike="noStrike">
+              <a:rPr b="0" lang="en-US" sz="1800" spc="-1" strike="noStrike">
                 <a:latin typeface="Arial"/>
               </a:rPr>
               <a:t>Fourth Outline Level</a:t>
             </a:r>
-            <a:endParaRPr b="0" lang="en-US" sz="2000" spc="-1" strike="noStrike">
+            <a:endParaRPr b="0" lang="en-US" sz="1800" spc="-1" strike="noStrike">
               <a:latin typeface="Arial"/>
             </a:endParaRPr>
           </a:p>
@@ -5161,12 +5155,12 @@
               <a:buChar char=""/>
             </a:pPr>
             <a:r>
-              <a:rPr b="0" lang="en-US" sz="2000" spc="-1" strike="noStrike">
+              <a:rPr b="0" lang="en-US" sz="1800" spc="-1" strike="noStrike">
                 <a:latin typeface="Arial"/>
               </a:rPr>
               <a:t>Fifth Outline Level</a:t>
             </a:r>
-            <a:endParaRPr b="0" lang="en-US" sz="2000" spc="-1" strike="noStrike">
+            <a:endParaRPr b="0" lang="en-US" sz="1800" spc="-1" strike="noStrike">
               <a:latin typeface="Arial"/>
             </a:endParaRPr>
           </a:p>
@@ -5183,12 +5177,12 @@
               <a:buChar char=""/>
             </a:pPr>
             <a:r>
-              <a:rPr b="0" lang="en-US" sz="2000" spc="-1" strike="noStrike">
+              <a:rPr b="0" lang="en-US" sz="1800" spc="-1" strike="noStrike">
                 <a:latin typeface="Arial"/>
               </a:rPr>
               <a:t>Sixth Outline Level</a:t>
             </a:r>
-            <a:endParaRPr b="0" lang="en-US" sz="2000" spc="-1" strike="noStrike">
+            <a:endParaRPr b="0" lang="en-US" sz="1800" spc="-1" strike="noStrike">
               <a:latin typeface="Arial"/>
             </a:endParaRPr>
           </a:p>
@@ -5205,12 +5199,12 @@
               <a:buChar char=""/>
             </a:pPr>
             <a:r>
-              <a:rPr b="0" lang="en-US" sz="2000" spc="-1" strike="noStrike">
+              <a:rPr b="0" lang="en-US" sz="1800" spc="-1" strike="noStrike">
                 <a:latin typeface="Arial"/>
               </a:rPr>
               <a:t>Seventh Outline Level</a:t>
             </a:r>
-            <a:endParaRPr b="0" lang="en-US" sz="2000" spc="-1" strike="noStrike">
+            <a:endParaRPr b="0" lang="en-US" sz="1800" spc="-1" strike="noStrike">
               <a:latin typeface="Arial"/>
             </a:endParaRPr>
           </a:p>
@@ -5269,7 +5263,7 @@
         <p:spPr>
           <a:xfrm rot="20715600">
             <a:off x="7996680" y="3565080"/>
-            <a:ext cx="911880" cy="927720"/>
+            <a:ext cx="911520" cy="927360"/>
           </a:xfrm>
           <a:custGeom>
             <a:avLst/>
@@ -5328,7 +5322,7 @@
         <p:spPr>
           <a:xfrm>
             <a:off x="642240" y="331560"/>
-            <a:ext cx="6942600" cy="927000"/>
+            <a:ext cx="6942240" cy="926640"/>
           </a:xfrm>
           <a:custGeom>
             <a:avLst/>
@@ -5408,7 +5402,7 @@
         <p:spPr>
           <a:xfrm>
             <a:off x="367920" y="421920"/>
-            <a:ext cx="8379000" cy="4302000"/>
+            <a:ext cx="8378640" cy="4301640"/>
           </a:xfrm>
           <a:custGeom>
             <a:avLst/>
@@ -5572,7 +5566,7 @@
         <p:spPr>
           <a:xfrm>
             <a:off x="3215160" y="370800"/>
-            <a:ext cx="1376280" cy="66240"/>
+            <a:ext cx="1375920" cy="65880"/>
           </a:xfrm>
           <a:custGeom>
             <a:avLst/>
@@ -5631,7 +5625,7 @@
         <p:spPr>
           <a:xfrm>
             <a:off x="4695120" y="404640"/>
-            <a:ext cx="263160" cy="30600"/>
+            <a:ext cx="262800" cy="30240"/>
           </a:xfrm>
           <a:custGeom>
             <a:avLst/>
@@ -5686,7 +5680,7 @@
         <p:spPr>
           <a:xfrm>
             <a:off x="8371080" y="397080"/>
-            <a:ext cx="289800" cy="230400"/>
+            <a:ext cx="289440" cy="230040"/>
           </a:xfrm>
           <a:custGeom>
             <a:avLst/>
@@ -5745,7 +5739,7 @@
         <p:spPr>
           <a:xfrm>
             <a:off x="244440" y="4093920"/>
-            <a:ext cx="745560" cy="775080"/>
+            <a:ext cx="745200" cy="774720"/>
           </a:xfrm>
           <a:custGeom>
             <a:avLst/>
@@ -5847,7 +5841,7 @@
         <p:spPr>
           <a:xfrm>
             <a:off x="8578080" y="2957040"/>
-            <a:ext cx="200160" cy="172080"/>
+            <a:ext cx="199800" cy="171720"/>
           </a:xfrm>
           <a:custGeom>
             <a:avLst/>
@@ -5932,7 +5926,7 @@
         <p:spPr>
           <a:xfrm>
             <a:off x="4853520" y="4606920"/>
-            <a:ext cx="851040" cy="154440"/>
+            <a:ext cx="850680" cy="154080"/>
           </a:xfrm>
           <a:custGeom>
             <a:avLst/>
@@ -6045,7 +6039,7 @@
         <p:spPr>
           <a:xfrm>
             <a:off x="8525880" y="347040"/>
-            <a:ext cx="131760" cy="90360"/>
+            <a:ext cx="131400" cy="90000"/>
           </a:xfrm>
           <a:custGeom>
             <a:avLst/>
@@ -6102,236 +6096,13 @@
             <a:spLocks noGrp="1"/>
           </p:cNvSpPr>
           <p:nvPr>
-            <p:ph type="title"/>
-          </p:nvPr>
-        </p:nvSpPr>
-        <p:spPr>
-          <a:xfrm>
-            <a:off x="883080" y="683280"/>
-            <a:ext cx="6425640" cy="395640"/>
-          </a:xfrm>
-          <a:prstGeom prst="rect">
-            <a:avLst/>
-          </a:prstGeom>
-          <a:noFill/>
-          <a:ln w="0">
-            <a:noFill/>
-          </a:ln>
-        </p:spPr>
-        <p:txBody>
-          <a:bodyPr lIns="0" rIns="0" tIns="0" bIns="0" anchor="ctr">
-            <a:noAutofit/>
-          </a:bodyPr>
-          <a:p>
-            <a:r>
-              <a:rPr b="0" lang="en-US" sz="1800" spc="-1" strike="noStrike">
-                <a:latin typeface="Arial"/>
-              </a:rPr>
-              <a:t>Click to edit the title text format</a:t>
-            </a:r>
-            <a:endParaRPr b="0" lang="en-US" sz="1800" spc="-1" strike="noStrike">
-              <a:latin typeface="Arial"/>
-            </a:endParaRPr>
-          </a:p>
-        </p:txBody>
-      </p:sp>
-      <p:sp>
-        <p:nvSpPr>
-          <p:cNvPr id="60" name="PlaceHolder 2"/>
-          <p:cNvSpPr>
-            <a:spLocks noGrp="1"/>
-          </p:cNvSpPr>
-          <p:nvPr>
-            <p:ph type="body"/>
-          </p:nvPr>
-        </p:nvSpPr>
-        <p:spPr>
-          <a:xfrm>
-            <a:off x="1187640" y="1505880"/>
-            <a:ext cx="6425640" cy="2839680"/>
-          </a:xfrm>
-          <a:prstGeom prst="rect">
-            <a:avLst/>
-          </a:prstGeom>
-          <a:noFill/>
-          <a:ln w="0">
-            <a:noFill/>
-          </a:ln>
-        </p:spPr>
-        <p:txBody>
-          <a:bodyPr lIns="0" rIns="0" tIns="0" bIns="0" anchor="t">
-            <a:normAutofit/>
-          </a:bodyPr>
-          <a:p>
-            <a:pPr marL="432000" indent="-324000">
-              <a:spcBef>
-                <a:spcPts val="1417"/>
-              </a:spcBef>
-              <a:buClr>
-                <a:srgbClr val="000000"/>
-              </a:buClr>
-              <a:buSzPct val="45000"/>
-              <a:buFont typeface="Wingdings" charset="2"/>
-              <a:buChar char=""/>
-            </a:pPr>
-            <a:r>
-              <a:rPr b="0" lang="en-US" sz="1800" spc="-1" strike="noStrike">
-                <a:latin typeface="Arial"/>
-              </a:rPr>
-              <a:t>Click to edit the outline text format</a:t>
-            </a:r>
-            <a:endParaRPr b="0" lang="en-US" sz="1800" spc="-1" strike="noStrike">
-              <a:latin typeface="Arial"/>
-            </a:endParaRPr>
-          </a:p>
-          <a:p>
-            <a:pPr lvl="1" marL="864000" indent="-324000">
-              <a:spcBef>
-                <a:spcPts val="1134"/>
-              </a:spcBef>
-              <a:buClr>
-                <a:srgbClr val="000000"/>
-              </a:buClr>
-              <a:buSzPct val="75000"/>
-              <a:buFont typeface="Symbol" charset="2"/>
-              <a:buChar char=""/>
-            </a:pPr>
-            <a:r>
-              <a:rPr b="0" lang="en-US" sz="1800" spc="-1" strike="noStrike">
-                <a:latin typeface="Arial"/>
-              </a:rPr>
-              <a:t>Second Outline Level</a:t>
-            </a:r>
-            <a:endParaRPr b="0" lang="en-US" sz="1800" spc="-1" strike="noStrike">
-              <a:latin typeface="Arial"/>
-            </a:endParaRPr>
-          </a:p>
-          <a:p>
-            <a:pPr lvl="2" marL="1296000" indent="-288000">
-              <a:spcBef>
-                <a:spcPts val="850"/>
-              </a:spcBef>
-              <a:buClr>
-                <a:srgbClr val="000000"/>
-              </a:buClr>
-              <a:buSzPct val="45000"/>
-              <a:buFont typeface="Wingdings" charset="2"/>
-              <a:buChar char=""/>
-            </a:pPr>
-            <a:r>
-              <a:rPr b="0" lang="en-US" sz="1800" spc="-1" strike="noStrike">
-                <a:latin typeface="Arial"/>
-              </a:rPr>
-              <a:t>Third Outline Level</a:t>
-            </a:r>
-            <a:endParaRPr b="0" lang="en-US" sz="1800" spc="-1" strike="noStrike">
-              <a:latin typeface="Arial"/>
-            </a:endParaRPr>
-          </a:p>
-          <a:p>
-            <a:pPr lvl="3" marL="1728000" indent="-216000">
-              <a:spcBef>
-                <a:spcPts val="567"/>
-              </a:spcBef>
-              <a:buClr>
-                <a:srgbClr val="000000"/>
-              </a:buClr>
-              <a:buSzPct val="75000"/>
-              <a:buFont typeface="Symbol" charset="2"/>
-              <a:buChar char=""/>
-            </a:pPr>
-            <a:r>
-              <a:rPr b="0" lang="en-US" sz="1800" spc="-1" strike="noStrike">
-                <a:latin typeface="Arial"/>
-              </a:rPr>
-              <a:t>Fourth Outline Level</a:t>
-            </a:r>
-            <a:endParaRPr b="0" lang="en-US" sz="1800" spc="-1" strike="noStrike">
-              <a:latin typeface="Arial"/>
-            </a:endParaRPr>
-          </a:p>
-          <a:p>
-            <a:pPr lvl="4" marL="2160000" indent="-216000">
-              <a:spcBef>
-                <a:spcPts val="283"/>
-              </a:spcBef>
-              <a:buClr>
-                <a:srgbClr val="000000"/>
-              </a:buClr>
-              <a:buSzPct val="45000"/>
-              <a:buFont typeface="Wingdings" charset="2"/>
-              <a:buChar char=""/>
-            </a:pPr>
-            <a:r>
-              <a:rPr b="0" lang="en-US" sz="1800" spc="-1" strike="noStrike">
-                <a:latin typeface="Arial"/>
-              </a:rPr>
-              <a:t>Fifth Outline Level</a:t>
-            </a:r>
-            <a:endParaRPr b="0" lang="en-US" sz="1800" spc="-1" strike="noStrike">
-              <a:latin typeface="Arial"/>
-            </a:endParaRPr>
-          </a:p>
-          <a:p>
-            <a:pPr lvl="5" marL="2592000" indent="-216000">
-              <a:spcBef>
-                <a:spcPts val="283"/>
-              </a:spcBef>
-              <a:buClr>
-                <a:srgbClr val="000000"/>
-              </a:buClr>
-              <a:buSzPct val="45000"/>
-              <a:buFont typeface="Wingdings" charset="2"/>
-              <a:buChar char=""/>
-            </a:pPr>
-            <a:r>
-              <a:rPr b="0" lang="en-US" sz="1800" spc="-1" strike="noStrike">
-                <a:latin typeface="Arial"/>
-              </a:rPr>
-              <a:t>Sixth Outline Level</a:t>
-            </a:r>
-            <a:endParaRPr b="0" lang="en-US" sz="1800" spc="-1" strike="noStrike">
-              <a:latin typeface="Arial"/>
-            </a:endParaRPr>
-          </a:p>
-          <a:p>
-            <a:pPr lvl="6" marL="3024000" indent="-216000">
-              <a:spcBef>
-                <a:spcPts val="283"/>
-              </a:spcBef>
-              <a:buClr>
-                <a:srgbClr val="000000"/>
-              </a:buClr>
-              <a:buSzPct val="45000"/>
-              <a:buFont typeface="Wingdings" charset="2"/>
-              <a:buChar char=""/>
-            </a:pPr>
-            <a:r>
-              <a:rPr b="0" lang="en-US" sz="1800" spc="-1" strike="noStrike">
-                <a:latin typeface="Arial"/>
-              </a:rPr>
-              <a:t>Seventh Outline Level</a:t>
-            </a:r>
-            <a:endParaRPr b="0" lang="en-US" sz="1800" spc="-1" strike="noStrike">
-              <a:latin typeface="Arial"/>
-            </a:endParaRPr>
-          </a:p>
-        </p:txBody>
-      </p:sp>
-      <p:sp>
-        <p:nvSpPr>
-          <p:cNvPr id="61" name="PlaceHolder 3"/>
-          <p:cNvSpPr>
-            <a:spLocks noGrp="1"/>
-          </p:cNvSpPr>
-          <p:nvPr>
             <p:ph type="sldNum" idx="1"/>
           </p:nvPr>
         </p:nvSpPr>
         <p:spPr>
           <a:xfrm>
             <a:off x="8403840" y="4692960"/>
-            <a:ext cx="547920" cy="299520"/>
+            <a:ext cx="547560" cy="299160"/>
           </a:xfrm>
           <a:prstGeom prst="rect">
             <a:avLst/>
@@ -6373,7 +6144,7 @@
                 <a:tab algn="l" pos="0"/>
               </a:tabLst>
             </a:pPr>
-            <a:fld id="{7D7C7771-BC79-4BCA-B31D-931C7DF97651}" type="slidenum">
+            <a:fld id="{E39F4049-4E8C-40B5-85B4-1567A03C3AB5}" type="slidenum">
               <a:rPr b="1" lang="en" sz="1500" spc="-1" strike="noStrike">
                 <a:solidFill>
                   <a:srgbClr val="7f8b91"/>
@@ -6385,6 +6156,232 @@
             </a:fld>
             <a:endParaRPr b="0" lang="en-US" sz="1500" spc="-1" strike="noStrike">
               <a:latin typeface="Times New Roman"/>
+            </a:endParaRPr>
+          </a:p>
+        </p:txBody>
+      </p:sp>
+      <p:sp>
+        <p:nvSpPr>
+          <p:cNvPr id="60" name="PlaceHolder 2"/>
+          <p:cNvSpPr>
+            <a:spLocks noGrp="1"/>
+          </p:cNvSpPr>
+          <p:nvPr>
+            <p:ph type="title"/>
+          </p:nvPr>
+        </p:nvSpPr>
+        <p:spPr>
+          <a:xfrm>
+            <a:off x="457200" y="205200"/>
+            <a:ext cx="8229240" cy="858600"/>
+          </a:xfrm>
+          <a:prstGeom prst="rect">
+            <a:avLst/>
+          </a:prstGeom>
+          <a:noFill/>
+          <a:ln w="0">
+            <a:noFill/>
+          </a:ln>
+        </p:spPr>
+        <p:txBody>
+          <a:bodyPr lIns="0" rIns="0" tIns="0" bIns="0" anchor="ctr">
+            <a:noAutofit/>
+          </a:bodyPr>
+          <a:p>
+            <a:pPr algn="ctr">
+              <a:buNone/>
+            </a:pPr>
+            <a:r>
+              <a:rPr b="0" lang="en-US" sz="4400" spc="-1" strike="noStrike">
+                <a:latin typeface="Arial"/>
+              </a:rPr>
+              <a:t>Click to edit the title text format</a:t>
+            </a:r>
+            <a:endParaRPr b="0" lang="en-US" sz="4400" spc="-1" strike="noStrike">
+              <a:latin typeface="Arial"/>
+            </a:endParaRPr>
+          </a:p>
+        </p:txBody>
+      </p:sp>
+      <p:sp>
+        <p:nvSpPr>
+          <p:cNvPr id="61" name="PlaceHolder 3"/>
+          <p:cNvSpPr>
+            <a:spLocks noGrp="1"/>
+          </p:cNvSpPr>
+          <p:nvPr>
+            <p:ph type="body"/>
+          </p:nvPr>
+        </p:nvSpPr>
+        <p:spPr>
+          <a:xfrm>
+            <a:off x="457200" y="1203480"/>
+            <a:ext cx="8229240" cy="2982960"/>
+          </a:xfrm>
+          <a:prstGeom prst="rect">
+            <a:avLst/>
+          </a:prstGeom>
+          <a:noFill/>
+          <a:ln w="0">
+            <a:noFill/>
+          </a:ln>
+        </p:spPr>
+        <p:txBody>
+          <a:bodyPr lIns="0" rIns="0" tIns="0" bIns="0" anchor="t">
+            <a:normAutofit/>
+          </a:bodyPr>
+          <a:p>
+            <a:pPr marL="432000" indent="-324000">
+              <a:spcBef>
+                <a:spcPts val="1417"/>
+              </a:spcBef>
+              <a:buClr>
+                <a:srgbClr val="000000"/>
+              </a:buClr>
+              <a:buSzPct val="45000"/>
+              <a:buFont typeface="Wingdings" charset="2"/>
+              <a:buChar char=""/>
+            </a:pPr>
+            <a:r>
+              <a:rPr b="0" lang="en-US" sz="3200" spc="-1" strike="noStrike">
+                <a:latin typeface="Arial"/>
+              </a:rPr>
+              <a:t>Click to edit the outline text format</a:t>
+            </a:r>
+            <a:endParaRPr b="0" lang="en-US" sz="3200" spc="-1" strike="noStrike">
+              <a:latin typeface="Arial"/>
+            </a:endParaRPr>
+          </a:p>
+          <a:p>
+            <a:pPr lvl="1" marL="864000" indent="-324000">
+              <a:spcBef>
+                <a:spcPts val="1134"/>
+              </a:spcBef>
+              <a:buClr>
+                <a:srgbClr val="000000"/>
+              </a:buClr>
+              <a:buSzPct val="75000"/>
+              <a:buFont typeface="Symbol" charset="2"/>
+              <a:buChar char=""/>
+            </a:pPr>
+            <a:r>
+              <a:rPr b="0" lang="en-US" sz="2800" spc="-1" strike="noStrike">
+                <a:latin typeface="Arial"/>
+              </a:rPr>
+              <a:t>Second Outline Level</a:t>
+            </a:r>
+            <a:endParaRPr b="0" lang="en-US" sz="2800" spc="-1" strike="noStrike">
+              <a:latin typeface="Arial"/>
+            </a:endParaRPr>
+          </a:p>
+          <a:p>
+            <a:pPr lvl="2" marL="1296000" indent="-288000">
+              <a:spcBef>
+                <a:spcPts val="850"/>
+              </a:spcBef>
+              <a:buClr>
+                <a:srgbClr val="000000"/>
+              </a:buClr>
+              <a:buSzPct val="45000"/>
+              <a:buFont typeface="Wingdings" charset="2"/>
+              <a:buChar char=""/>
+            </a:pPr>
+            <a:r>
+              <a:rPr b="0" lang="en-US" sz="2400" spc="-1" strike="noStrike">
+                <a:latin typeface="Arial"/>
+              </a:rPr>
+              <a:t>Third Outline Level</a:t>
+            </a:r>
+            <a:endParaRPr b="0" lang="en-US" sz="2400" spc="-1" strike="noStrike">
+              <a:latin typeface="Arial"/>
+            </a:endParaRPr>
+          </a:p>
+          <a:p>
+            <a:pPr lvl="3" marL="1728000" indent="-216000">
+              <a:spcBef>
+                <a:spcPts val="567"/>
+              </a:spcBef>
+              <a:buClr>
+                <a:srgbClr val="000000"/>
+              </a:buClr>
+              <a:buSzPct val="75000"/>
+              <a:buFont typeface="Symbol" charset="2"/>
+              <a:buChar char=""/>
+            </a:pPr>
+            <a:r>
+              <a:rPr b="0" lang="en-US" sz="2000" spc="-1" strike="noStrike">
+                <a:latin typeface="Arial"/>
+              </a:rPr>
+              <a:t>Fourth Outline Level</a:t>
+            </a:r>
+            <a:endParaRPr b="0" lang="en-US" sz="2000" spc="-1" strike="noStrike">
+              <a:latin typeface="Arial"/>
+            </a:endParaRPr>
+          </a:p>
+          <a:p>
+            <a:pPr lvl="4" marL="2160000" indent="-216000">
+              <a:spcBef>
+                <a:spcPts val="283"/>
+              </a:spcBef>
+              <a:buClr>
+                <a:srgbClr val="000000"/>
+              </a:buClr>
+              <a:buSzPct val="45000"/>
+              <a:buFont typeface="Wingdings" charset="2"/>
+              <a:buChar char=""/>
+            </a:pPr>
+            <a:r>
+              <a:rPr b="0" lang="en-US" sz="2000" spc="-1" strike="noStrike">
+                <a:latin typeface="Arial"/>
+              </a:rPr>
+              <a:t>Fifth Outline Level</a:t>
+            </a:r>
+            <a:endParaRPr b="0" lang="en-US" sz="2000" spc="-1" strike="noStrike">
+              <a:latin typeface="Arial"/>
+            </a:endParaRPr>
+          </a:p>
+          <a:p>
+            <a:pPr lvl="5" marL="2592000" indent="-216000">
+              <a:spcBef>
+                <a:spcPts val="283"/>
+              </a:spcBef>
+              <a:buClr>
+                <a:srgbClr val="000000"/>
+              </a:buClr>
+              <a:buSzPct val="45000"/>
+              <a:buFont typeface="Wingdings" charset="2"/>
+              <a:buChar char=""/>
+            </a:pPr>
+            <a:r>
+              <a:rPr b="0" lang="en-US" sz="2000" spc="-1" strike="noStrike">
+                <a:latin typeface="Arial"/>
+              </a:rPr>
+              <a:t>Sixth Outline Level</a:t>
+            </a:r>
+            <a:endParaRPr b="0" lang="en-US" sz="2000" spc="-1" strike="noStrike">
+              <a:latin typeface="Arial"/>
+            </a:endParaRPr>
+          </a:p>
+          <a:p>
+            <a:pPr lvl="6" marL="3024000" indent="-216000">
+              <a:spcBef>
+                <a:spcPts val="283"/>
+              </a:spcBef>
+              <a:buClr>
+                <a:srgbClr val="000000"/>
+              </a:buClr>
+              <a:buSzPct val="45000"/>
+              <a:buFont typeface="Wingdings" charset="2"/>
+              <a:buChar char=""/>
+            </a:pPr>
+            <a:r>
+              <a:rPr b="0" lang="en-US" sz="2000" spc="-1" strike="noStrike">
+                <a:latin typeface="Arial"/>
+              </a:rPr>
+              <a:t>Seventh Outline Level</a:t>
+            </a:r>
+            <a:endParaRPr b="0" lang="en-US" sz="2000" spc="-1" strike="noStrike">
+              <a:latin typeface="Arial"/>
             </a:endParaRPr>
           </a:p>
         </p:txBody>
@@ -6439,7 +6436,7 @@
         <p:spPr>
           <a:xfrm>
             <a:off x="1263960" y="1760040"/>
-            <a:ext cx="6614640" cy="2054880"/>
+            <a:ext cx="6614280" cy="2054520"/>
           </a:xfrm>
           <a:prstGeom prst="rect">
             <a:avLst/>
@@ -6522,7 +6519,7 @@
         <p:spPr>
           <a:xfrm>
             <a:off x="883080" y="682920"/>
-            <a:ext cx="6425640" cy="395640"/>
+            <a:ext cx="6425280" cy="395280"/>
           </a:xfrm>
           <a:prstGeom prst="rect">
             <a:avLst/>
@@ -6575,7 +6572,7 @@
         <p:spPr>
           <a:xfrm>
             <a:off x="8403840" y="4692960"/>
-            <a:ext cx="547920" cy="299520"/>
+            <a:ext cx="547560" cy="299160"/>
           </a:xfrm>
           <a:prstGeom prst="rect">
             <a:avLst/>
@@ -6617,7 +6614,7 @@
                 <a:tab algn="l" pos="0"/>
               </a:tabLst>
             </a:pPr>
-            <a:fld id="{DD965A9D-275E-4893-80F9-F4CF525FD304}" type="slidenum">
+            <a:fld id="{47B0D379-DFEA-4B94-9873-F3D291C433CC}" type="slidenum">
               <a:rPr b="1" lang="en" sz="1500" spc="-1" strike="noStrike">
                 <a:solidFill>
                   <a:srgbClr val="7f8b91"/>
@@ -6642,7 +6639,7 @@
         <p:spPr>
           <a:xfrm>
             <a:off x="7648200" y="3814560"/>
-            <a:ext cx="937080" cy="834480"/>
+            <a:ext cx="936720" cy="834120"/>
           </a:xfrm>
           <a:custGeom>
             <a:avLst/>
@@ -7040,7 +7037,7 @@
         <p:spPr>
           <a:xfrm>
             <a:off x="1188000" y="1505880"/>
-            <a:ext cx="6425640" cy="2839680"/>
+            <a:ext cx="6425280" cy="2839320"/>
           </a:xfrm>
           <a:prstGeom prst="rect">
             <a:avLst/>
@@ -7245,7 +7242,7 @@
         <p:spPr>
           <a:xfrm>
             <a:off x="883080" y="682920"/>
-            <a:ext cx="6425640" cy="395640"/>
+            <a:ext cx="6425280" cy="395280"/>
           </a:xfrm>
           <a:prstGeom prst="rect">
             <a:avLst/>
@@ -7298,7 +7295,7 @@
         <p:spPr>
           <a:xfrm>
             <a:off x="8403840" y="4692960"/>
-            <a:ext cx="547920" cy="299520"/>
+            <a:ext cx="547560" cy="299160"/>
           </a:xfrm>
           <a:prstGeom prst="rect">
             <a:avLst/>
@@ -7340,7 +7337,7 @@
                 <a:tab algn="l" pos="0"/>
               </a:tabLst>
             </a:pPr>
-            <a:fld id="{C8AA4E6F-8939-4626-86C4-ABA2295FE482}" type="slidenum">
+            <a:fld id="{691CF432-5986-47F5-98AB-1E3139B7B3D5}" type="slidenum">
               <a:rPr b="1" lang="en" sz="1500" spc="-1" strike="noStrike">
                 <a:solidFill>
                   <a:srgbClr val="7f8b91"/>
@@ -7365,7 +7362,7 @@
         <p:spPr>
           <a:xfrm>
             <a:off x="7648200" y="3814560"/>
-            <a:ext cx="937080" cy="834480"/>
+            <a:ext cx="936720" cy="834120"/>
           </a:xfrm>
           <a:custGeom>
             <a:avLst/>
@@ -7763,7 +7760,7 @@
         <p:spPr>
           <a:xfrm>
             <a:off x="1188000" y="1505880"/>
-            <a:ext cx="6425640" cy="2839680"/>
+            <a:ext cx="6425280" cy="2839320"/>
           </a:xfrm>
           <a:prstGeom prst="rect">
             <a:avLst/>
@@ -8010,7 +8007,7 @@
         <p:spPr>
           <a:xfrm>
             <a:off x="883080" y="682920"/>
-            <a:ext cx="6425640" cy="395640"/>
+            <a:ext cx="6425280" cy="395280"/>
           </a:xfrm>
           <a:prstGeom prst="rect">
             <a:avLst/>
@@ -8063,7 +8060,7 @@
         <p:spPr>
           <a:xfrm>
             <a:off x="8403840" y="4692960"/>
-            <a:ext cx="547920" cy="299520"/>
+            <a:ext cx="547560" cy="299160"/>
           </a:xfrm>
           <a:prstGeom prst="rect">
             <a:avLst/>
@@ -8105,7 +8102,7 @@
                 <a:tab algn="l" pos="0"/>
               </a:tabLst>
             </a:pPr>
-            <a:fld id="{986E3D38-8B18-4162-8B20-AAB2D695FD52}" type="slidenum">
+            <a:fld id="{F231164B-1D05-48A0-AFE4-DFE58AA439B1}" type="slidenum">
               <a:rPr b="1" lang="en" sz="1500" spc="-1" strike="noStrike">
                 <a:solidFill>
                   <a:srgbClr val="7f8b91"/>
@@ -8130,7 +8127,7 @@
         <p:spPr>
           <a:xfrm>
             <a:off x="7648200" y="3814560"/>
-            <a:ext cx="937080" cy="834480"/>
+            <a:ext cx="936720" cy="834120"/>
           </a:xfrm>
           <a:custGeom>
             <a:avLst/>
@@ -8528,7 +8525,7 @@
         <p:spPr>
           <a:xfrm>
             <a:off x="1188000" y="1505880"/>
-            <a:ext cx="6425640" cy="2839680"/>
+            <a:ext cx="6425280" cy="2839320"/>
           </a:xfrm>
           <a:prstGeom prst="rect">
             <a:avLst/>
@@ -8733,7 +8730,7 @@
         <p:spPr>
           <a:xfrm>
             <a:off x="883080" y="682920"/>
-            <a:ext cx="6425640" cy="395640"/>
+            <a:ext cx="6425280" cy="395280"/>
           </a:xfrm>
           <a:prstGeom prst="rect">
             <a:avLst/>
@@ -8786,7 +8783,7 @@
         <p:spPr>
           <a:xfrm>
             <a:off x="8403840" y="4692960"/>
-            <a:ext cx="547920" cy="299520"/>
+            <a:ext cx="547560" cy="299160"/>
           </a:xfrm>
           <a:prstGeom prst="rect">
             <a:avLst/>
@@ -8828,7 +8825,7 @@
                 <a:tab algn="l" pos="0"/>
               </a:tabLst>
             </a:pPr>
-            <a:fld id="{F2CFDC3C-C0BB-47B3-B11C-7CB693524201}" type="slidenum">
+            <a:fld id="{07340D12-3C30-4B7A-B808-C6D437A9C04E}" type="slidenum">
               <a:rPr b="1" lang="en" sz="1500" spc="-1" strike="noStrike">
                 <a:solidFill>
                   <a:srgbClr val="7f8b91"/>
@@ -8853,7 +8850,7 @@
         <p:spPr>
           <a:xfrm>
             <a:off x="7648200" y="3814560"/>
-            <a:ext cx="937080" cy="834480"/>
+            <a:ext cx="936720" cy="834120"/>
           </a:xfrm>
           <a:custGeom>
             <a:avLst/>
@@ -9251,7 +9248,7 @@
         <p:spPr>
           <a:xfrm>
             <a:off x="1188000" y="1505880"/>
-            <a:ext cx="6425640" cy="2839680"/>
+            <a:ext cx="6425280" cy="2839320"/>
           </a:xfrm>
           <a:prstGeom prst="rect">
             <a:avLst/>
@@ -9456,7 +9453,7 @@
         <p:spPr>
           <a:xfrm>
             <a:off x="883080" y="682920"/>
-            <a:ext cx="6425640" cy="395640"/>
+            <a:ext cx="6425280" cy="395280"/>
           </a:xfrm>
           <a:prstGeom prst="rect">
             <a:avLst/>
@@ -9509,7 +9506,7 @@
         <p:spPr>
           <a:xfrm>
             <a:off x="8403840" y="4692960"/>
-            <a:ext cx="547920" cy="299520"/>
+            <a:ext cx="547560" cy="299160"/>
           </a:xfrm>
           <a:prstGeom prst="rect">
             <a:avLst/>
@@ -9551,7 +9548,7 @@
                 <a:tab algn="l" pos="0"/>
               </a:tabLst>
             </a:pPr>
-            <a:fld id="{438E8482-CAFC-40C6-A0AB-B00D917654A3}" type="slidenum">
+            <a:fld id="{138323C5-DE43-48C2-913E-90AF5DEAD8B4}" type="slidenum">
               <a:rPr b="1" lang="en" sz="1500" spc="-1" strike="noStrike">
                 <a:solidFill>
                   <a:srgbClr val="7f8b91"/>
@@ -9576,7 +9573,7 @@
         <p:spPr>
           <a:xfrm>
             <a:off x="7648200" y="3814560"/>
-            <a:ext cx="937080" cy="834480"/>
+            <a:ext cx="936720" cy="834120"/>
           </a:xfrm>
           <a:custGeom>
             <a:avLst/>
@@ -9974,7 +9971,7 @@
         <p:spPr>
           <a:xfrm>
             <a:off x="1188000" y="1505880"/>
-            <a:ext cx="6425640" cy="2839680"/>
+            <a:ext cx="6425280" cy="2839320"/>
           </a:xfrm>
           <a:prstGeom prst="rect">
             <a:avLst/>
@@ -10179,7 +10176,7 @@
         <p:spPr>
           <a:xfrm>
             <a:off x="883080" y="682920"/>
-            <a:ext cx="6425640" cy="395640"/>
+            <a:ext cx="6425280" cy="395280"/>
           </a:xfrm>
           <a:prstGeom prst="rect">
             <a:avLst/>
@@ -10232,7 +10229,7 @@
         <p:spPr>
           <a:xfrm>
             <a:off x="8403840" y="4692960"/>
-            <a:ext cx="547920" cy="299520"/>
+            <a:ext cx="547560" cy="299160"/>
           </a:xfrm>
           <a:prstGeom prst="rect">
             <a:avLst/>
@@ -10274,7 +10271,7 @@
                 <a:tab algn="l" pos="0"/>
               </a:tabLst>
             </a:pPr>
-            <a:fld id="{62383694-326C-44F9-B5CA-B0616656CFFF}" type="slidenum">
+            <a:fld id="{46474115-A6A6-49CB-8DBA-4FCE9F638A99}" type="slidenum">
               <a:rPr b="1" lang="en" sz="1500" spc="-1" strike="noStrike">
                 <a:solidFill>
                   <a:srgbClr val="7f8b91"/>
@@ -10299,7 +10296,7 @@
         <p:spPr>
           <a:xfrm>
             <a:off x="7648200" y="3814560"/>
-            <a:ext cx="937080" cy="834480"/>
+            <a:ext cx="936720" cy="834120"/>
           </a:xfrm>
           <a:custGeom>
             <a:avLst/>
@@ -10697,7 +10694,7 @@
         <p:spPr>
           <a:xfrm>
             <a:off x="1188000" y="1505880"/>
-            <a:ext cx="6425640" cy="2839680"/>
+            <a:ext cx="6425280" cy="2839320"/>
           </a:xfrm>
           <a:prstGeom prst="rect">
             <a:avLst/>
@@ -10902,7 +10899,7 @@
         <p:spPr>
           <a:xfrm>
             <a:off x="883080" y="682920"/>
-            <a:ext cx="6425640" cy="395640"/>
+            <a:ext cx="6425280" cy="395280"/>
           </a:xfrm>
           <a:prstGeom prst="rect">
             <a:avLst/>
@@ -10955,7 +10952,7 @@
         <p:spPr>
           <a:xfrm>
             <a:off x="8403840" y="4692960"/>
-            <a:ext cx="547920" cy="299520"/>
+            <a:ext cx="547560" cy="299160"/>
           </a:xfrm>
           <a:prstGeom prst="rect">
             <a:avLst/>
@@ -10997,7 +10994,7 @@
                 <a:tab algn="l" pos="0"/>
               </a:tabLst>
             </a:pPr>
-            <a:fld id="{EB4E52D9-87EA-4C26-B359-ADF386DFD351}" type="slidenum">
+            <a:fld id="{CEADEAEC-B9D7-4E01-9AC9-9977406691D1}" type="slidenum">
               <a:rPr b="1" lang="en" sz="1500" spc="-1" strike="noStrike">
                 <a:solidFill>
                   <a:srgbClr val="7f8b91"/>
@@ -11022,7 +11019,7 @@
         <p:spPr>
           <a:xfrm>
             <a:off x="7648200" y="3814560"/>
-            <a:ext cx="937080" cy="834480"/>
+            <a:ext cx="936720" cy="834120"/>
           </a:xfrm>
           <a:custGeom>
             <a:avLst/>
@@ -11420,7 +11417,7 @@
         <p:spPr>
           <a:xfrm>
             <a:off x="1188000" y="1505880"/>
-            <a:ext cx="6425640" cy="2839680"/>
+            <a:ext cx="6425280" cy="2839320"/>
           </a:xfrm>
           <a:prstGeom prst="rect">
             <a:avLst/>
@@ -11665,7 +11662,7 @@
         <p:spPr>
           <a:xfrm>
             <a:off x="883080" y="682920"/>
-            <a:ext cx="6425640" cy="395640"/>
+            <a:ext cx="6425280" cy="395280"/>
           </a:xfrm>
           <a:prstGeom prst="rect">
             <a:avLst/>
@@ -11718,7 +11715,7 @@
         <p:spPr>
           <a:xfrm>
             <a:off x="8403840" y="4692960"/>
-            <a:ext cx="547920" cy="299520"/>
+            <a:ext cx="547560" cy="299160"/>
           </a:xfrm>
           <a:prstGeom prst="rect">
             <a:avLst/>
@@ -11760,7 +11757,7 @@
                 <a:tab algn="l" pos="0"/>
               </a:tabLst>
             </a:pPr>
-            <a:fld id="{7A51793C-5778-4C28-8817-6ECAE676959C}" type="slidenum">
+            <a:fld id="{1A50DFF4-BBB7-42A1-8115-F900B33932F3}" type="slidenum">
               <a:rPr b="1" lang="en" sz="1500" spc="-1" strike="noStrike">
                 <a:solidFill>
                   <a:srgbClr val="7f8b91"/>
@@ -11785,7 +11782,7 @@
         <p:spPr>
           <a:xfrm>
             <a:off x="7648200" y="3814560"/>
-            <a:ext cx="937080" cy="834480"/>
+            <a:ext cx="936720" cy="834120"/>
           </a:xfrm>
           <a:custGeom>
             <a:avLst/>
@@ -12183,7 +12180,7 @@
         <p:spPr>
           <a:xfrm>
             <a:off x="1188000" y="1307520"/>
-            <a:ext cx="6425640" cy="2839680"/>
+            <a:ext cx="6425280" cy="2839320"/>
           </a:xfrm>
           <a:prstGeom prst="rect">
             <a:avLst/>
@@ -12270,18 +12267,7 @@
                 <a:latin typeface="Nunito"/>
                 <a:ea typeface="Nunito"/>
               </a:rPr>
-              <a:t>a small static binary that can be </a:t>
-            </a:r>
-            <a:r>
-              <a:rPr b="0" lang="en-US" sz="1200" spc="-1" strike="noStrike" u="sng">
-                <a:solidFill>
-                  <a:srgbClr val="2b3547"/>
-                </a:solidFill>
-                <a:uFillTx/>
-                <a:latin typeface="Nunito"/>
-                <a:ea typeface="Nunito"/>
-              </a:rPr>
-              <a:t>deployed anywhere from large instances</a:t>
+              <a:t>a small static binary that can be deployed anywhere from large instances</a:t>
             </a:r>
             <a:r>
               <a:rPr b="0" lang="en-US" sz="1200" spc="-1" strike="noStrike">
@@ -12291,67 +12277,7 @@
                 <a:latin typeface="Nunito"/>
                 <a:ea typeface="Nunito"/>
               </a:rPr>
-              <a:t> in the cloud to resource constrained </a:t>
-            </a:r>
-            <a:r>
-              <a:rPr b="0" lang="en-US" sz="1200" spc="-1" strike="noStrike">
-                <a:solidFill>
-                  <a:srgbClr val="2b3547"/>
-                </a:solidFill>
-                <a:latin typeface="Nunito"/>
-                <a:ea typeface="Nunito"/>
-              </a:rPr>
-              <a:t>devices like a Raspberry PI. NATS supports the Adaptive Edge architecture </a:t>
-            </a:r>
-            <a:r>
-              <a:rPr b="0" lang="en-US" sz="1200" spc="-1" strike="noStrike">
-                <a:solidFill>
-                  <a:srgbClr val="2b3547"/>
-                </a:solidFill>
-                <a:latin typeface="Nunito"/>
-                <a:ea typeface="Nunito"/>
-              </a:rPr>
-              <a:t>which allows for large, flexible deployments. Single servers, leaf nodes, </a:t>
-            </a:r>
-            <a:r>
-              <a:rPr b="0" lang="en-US" sz="1200" spc="-1" strike="noStrike">
-                <a:solidFill>
-                  <a:srgbClr val="2b3547"/>
-                </a:solidFill>
-                <a:latin typeface="Nunito"/>
-                <a:ea typeface="Nunito"/>
-              </a:rPr>
-              <a:t>clusters, and superclusters (cluster of clusters) can be combined in any </a:t>
-            </a:r>
-            <a:r>
-              <a:rPr b="0" lang="en-US" sz="1200" spc="-1" strike="noStrike">
-                <a:solidFill>
-                  <a:srgbClr val="2b3547"/>
-                </a:solidFill>
-                <a:latin typeface="Nunito"/>
-                <a:ea typeface="Nunito"/>
-              </a:rPr>
-              <a:t>fashion for an extremely flexible deployment amenable to cloud, on-premise, </a:t>
-            </a:r>
-            <a:r>
-              <a:rPr b="0" lang="en-US" sz="1200" spc="-1" strike="noStrike">
-                <a:solidFill>
-                  <a:srgbClr val="2b3547"/>
-                </a:solidFill>
-                <a:latin typeface="Nunito"/>
-                <a:ea typeface="Nunito"/>
-              </a:rPr>
-              <a:t>edge and IoT. Clients are unaware of topology and can connect to any NATS </a:t>
-            </a:r>
-            <a:r>
-              <a:rPr b="0" lang="en-US" sz="1200" spc="-1" strike="noStrike">
-                <a:solidFill>
-                  <a:srgbClr val="2b3547"/>
-                </a:solidFill>
-                <a:latin typeface="Nunito"/>
-                <a:ea typeface="Nunito"/>
-              </a:rPr>
-              <a:t>server in a deployment.</a:t>
+              <a:t> in the cloud to resource constrained devices like a Raspberry PI. NATS supports the Adaptive Edge architecture which allows for large, flexible deployments. Single servers, leaf nodes, clusters, and superclusters (cluster of clusters) can be combined in any fashion for an extremely flexible deployment amenable to cloud, on-premise, edge and IoT. Clients are unaware of topology and can connect to any NATS server in a deployment.</a:t>
             </a:r>
             <a:endParaRPr b="0" lang="en-US" sz="1200" spc="-1" strike="noStrike">
               <a:latin typeface="Arial"/>
@@ -12402,7 +12328,7 @@
         <p:spPr>
           <a:xfrm>
             <a:off x="883080" y="682920"/>
-            <a:ext cx="6425640" cy="395640"/>
+            <a:ext cx="6425280" cy="395280"/>
           </a:xfrm>
           <a:prstGeom prst="rect">
             <a:avLst/>
@@ -12455,7 +12381,7 @@
         <p:spPr>
           <a:xfrm>
             <a:off x="8403840" y="4692960"/>
-            <a:ext cx="547920" cy="299520"/>
+            <a:ext cx="547560" cy="299160"/>
           </a:xfrm>
           <a:prstGeom prst="rect">
             <a:avLst/>
@@ -12497,7 +12423,7 @@
                 <a:tab algn="l" pos="0"/>
               </a:tabLst>
             </a:pPr>
-            <a:fld id="{DF81F461-9AB9-4294-8C2E-D7289C70C9C3}" type="slidenum">
+            <a:fld id="{7182FB94-35A0-451F-9363-D883CD3791C1}" type="slidenum">
               <a:rPr b="1" lang="en" sz="1500" spc="-1" strike="noStrike">
                 <a:solidFill>
                   <a:srgbClr val="7f8b91"/>
@@ -12522,7 +12448,7 @@
         <p:spPr>
           <a:xfrm>
             <a:off x="7648200" y="3814560"/>
-            <a:ext cx="937080" cy="834480"/>
+            <a:ext cx="936720" cy="834120"/>
           </a:xfrm>
           <a:custGeom>
             <a:avLst/>
@@ -12920,7 +12846,7 @@
         <p:spPr>
           <a:xfrm>
             <a:off x="1188000" y="1307520"/>
-            <a:ext cx="6425640" cy="2839680"/>
+            <a:ext cx="6425280" cy="2839320"/>
           </a:xfrm>
           <a:prstGeom prst="rect">
             <a:avLst/>
@@ -13086,7 +13012,7 @@
         <p:spPr>
           <a:xfrm>
             <a:off x="883080" y="682920"/>
-            <a:ext cx="6425640" cy="395640"/>
+            <a:ext cx="6425280" cy="395280"/>
           </a:xfrm>
           <a:prstGeom prst="rect">
             <a:avLst/>
@@ -13139,7 +13065,7 @@
         <p:spPr>
           <a:xfrm>
             <a:off x="8403840" y="4692960"/>
-            <a:ext cx="547920" cy="299520"/>
+            <a:ext cx="547560" cy="299160"/>
           </a:xfrm>
           <a:prstGeom prst="rect">
             <a:avLst/>
@@ -13181,7 +13107,7 @@
                 <a:tab algn="l" pos="0"/>
               </a:tabLst>
             </a:pPr>
-            <a:fld id="{9B296939-E106-417E-ABA7-5D4DBC28B0FA}" type="slidenum">
+            <a:fld id="{90936728-7E70-4F96-B45A-D67BA534EF90}" type="slidenum">
               <a:rPr b="1" lang="en" sz="1500" spc="-1" strike="noStrike">
                 <a:solidFill>
                   <a:srgbClr val="7f8b91"/>
@@ -13206,7 +13132,7 @@
         <p:spPr>
           <a:xfrm>
             <a:off x="7648200" y="3814560"/>
-            <a:ext cx="937080" cy="834480"/>
+            <a:ext cx="936720" cy="834120"/>
           </a:xfrm>
           <a:custGeom>
             <a:avLst/>
@@ -13604,7 +13530,7 @@
         <p:spPr>
           <a:xfrm>
             <a:off x="1188000" y="1307520"/>
-            <a:ext cx="6425640" cy="2839680"/>
+            <a:ext cx="6425280" cy="2839320"/>
           </a:xfrm>
           <a:prstGeom prst="rect">
             <a:avLst/>
@@ -13680,7 +13606,37 @@
                 <a:latin typeface="Nunito"/>
                 <a:ea typeface="Nunito"/>
               </a:rPr>
-              <a:t>NATS supports exporting monitoring data to Prometheus and has Grafana dashboards to monitor and configure alerts. There are also development monitoring tools such as nats-top. Robust side car deployment or a simple connect-and-view model with NATS surveyor is supported.</a:t>
+              <a:t>NATS supports exporting monitoring data to Prometheus and has </a:t>
+            </a:r>
+            <a:r>
+              <a:rPr b="0" lang="en-US" sz="1200" spc="-1" strike="noStrike">
+                <a:solidFill>
+                  <a:srgbClr val="2b3547"/>
+                </a:solidFill>
+                <a:latin typeface="Nunito"/>
+                <a:ea typeface="Nunito"/>
+              </a:rPr>
+              <a:t>Grafana dashboards to monitor and configure alerts. There are also </a:t>
+            </a:r>
+            <a:r>
+              <a:rPr b="0" lang="en-US" sz="1200" spc="-1" strike="noStrike">
+                <a:solidFill>
+                  <a:srgbClr val="2b3547"/>
+                </a:solidFill>
+                <a:latin typeface="Nunito"/>
+                <a:ea typeface="Nunito"/>
+              </a:rPr>
+              <a:t>development monitoring tools such as nats-top. Robust side car deployment </a:t>
+            </a:r>
+            <a:r>
+              <a:rPr b="0" lang="en-US" sz="1200" spc="-1" strike="noStrike">
+                <a:solidFill>
+                  <a:srgbClr val="2b3547"/>
+                </a:solidFill>
+                <a:latin typeface="Nunito"/>
+                <a:ea typeface="Nunito"/>
+              </a:rPr>
+              <a:t>or a simple connect-and-view model with NATS surveyor is supported.</a:t>
             </a:r>
             <a:endParaRPr b="0" lang="en-US" sz="1200" spc="-1" strike="noStrike">
               <a:latin typeface="Arial"/>
@@ -13719,7 +13675,17 @@
                 <a:latin typeface="Nunito"/>
                 <a:ea typeface="Nunito"/>
               </a:rPr>
-              <a:t>Kafka has a number of management tools and consoles including Confluent Control Center, Kafka, Kafka Web Console, Kafka Offset Monitor.</a:t>
+              <a:t>Kafka has a number of management tools and consoles including </a:t>
+            </a:r>
+            <a:r>
+              <a:rPr b="0" lang="en-US" sz="1200" spc="-1" strike="noStrike">
+                <a:solidFill>
+                  <a:srgbClr val="2b3547"/>
+                </a:solidFill>
+                <a:latin typeface="Nunito"/>
+                <a:ea typeface="Nunito"/>
+              </a:rPr>
+              <a:t>Confluent Control Center, Kafka, Kafka Web Console, Kafka Offset Monitor.</a:t>
             </a:r>
             <a:endParaRPr b="0" lang="en-US" sz="1200" spc="-1" strike="noStrike">
               <a:latin typeface="Arial"/>
@@ -13758,7 +13724,17 @@
                 <a:latin typeface="Nunito"/>
                 <a:ea typeface="Nunito"/>
               </a:rPr>
-              <a:t>CLI tools, a plugin-based management system with dashboards and third-party tools.</a:t>
+              <a:t>CLI tools, a plugin-based management system with dashboards </a:t>
+            </a:r>
+            <a:r>
+              <a:rPr b="0" lang="en-US" sz="1200" spc="-1" strike="noStrike">
+                <a:solidFill>
+                  <a:srgbClr val="2b3547"/>
+                </a:solidFill>
+                <a:latin typeface="Nunito"/>
+                <a:ea typeface="Nunito"/>
+              </a:rPr>
+              <a:t>and third-party tools.</a:t>
             </a:r>
             <a:endParaRPr b="0" lang="en-US" sz="1200" spc="-1" strike="noStrike">
               <a:latin typeface="Arial"/>
@@ -13809,7 +13785,7 @@
         <p:spPr>
           <a:xfrm>
             <a:off x="883080" y="682920"/>
-            <a:ext cx="6425640" cy="395640"/>
+            <a:ext cx="6425280" cy="395280"/>
           </a:xfrm>
           <a:prstGeom prst="rect">
             <a:avLst/>
@@ -13862,7 +13838,7 @@
         <p:spPr>
           <a:xfrm>
             <a:off x="1187640" y="1600200"/>
-            <a:ext cx="6127560" cy="2743200"/>
+            <a:ext cx="6127200" cy="2742840"/>
           </a:xfrm>
           <a:prstGeom prst="rect">
             <a:avLst/>
@@ -13995,7 +13971,7 @@
         <p:spPr>
           <a:xfrm>
             <a:off x="8403840" y="4692960"/>
-            <a:ext cx="547920" cy="299520"/>
+            <a:ext cx="547560" cy="299160"/>
           </a:xfrm>
           <a:prstGeom prst="rect">
             <a:avLst/>
@@ -14037,7 +14013,7 @@
                 <a:tab algn="l" pos="0"/>
               </a:tabLst>
             </a:pPr>
-            <a:fld id="{0508285B-CB4C-4E61-A2F0-2D88F5B29E07}" type="slidenum">
+            <a:fld id="{2D758820-71AE-4E64-9FB2-9611848DDFA1}" type="slidenum">
               <a:rPr b="1" lang="en" sz="1500" spc="-1" strike="noStrike">
                 <a:solidFill>
                   <a:srgbClr val="7f8b91"/>
@@ -14062,7 +14038,7 @@
         <p:spPr>
           <a:xfrm>
             <a:off x="7648200" y="3814560"/>
-            <a:ext cx="937080" cy="834480"/>
+            <a:ext cx="936720" cy="834120"/>
           </a:xfrm>
           <a:custGeom>
             <a:avLst/>
@@ -14490,7 +14466,7 @@
         <p:spPr>
           <a:xfrm>
             <a:off x="883080" y="682920"/>
-            <a:ext cx="6425640" cy="395640"/>
+            <a:ext cx="6425280" cy="395280"/>
           </a:xfrm>
           <a:prstGeom prst="rect">
             <a:avLst/>
@@ -14543,7 +14519,7 @@
         <p:spPr>
           <a:xfrm>
             <a:off x="8403840" y="4692960"/>
-            <a:ext cx="547920" cy="299520"/>
+            <a:ext cx="547560" cy="299160"/>
           </a:xfrm>
           <a:prstGeom prst="rect">
             <a:avLst/>
@@ -14585,7 +14561,7 @@
                 <a:tab algn="l" pos="0"/>
               </a:tabLst>
             </a:pPr>
-            <a:fld id="{2BE7FD02-2F2B-43E5-808A-B2938316194F}" type="slidenum">
+            <a:fld id="{AB2AB396-81AA-4C36-A932-14B02D4A2A02}" type="slidenum">
               <a:rPr b="1" lang="en" sz="1500" spc="-1" strike="noStrike">
                 <a:solidFill>
                   <a:srgbClr val="7f8b91"/>
@@ -14610,7 +14586,7 @@
         <p:spPr>
           <a:xfrm>
             <a:off x="7648200" y="3814560"/>
-            <a:ext cx="937080" cy="834480"/>
+            <a:ext cx="936720" cy="834120"/>
           </a:xfrm>
           <a:custGeom>
             <a:avLst/>
@@ -15008,7 +14984,7 @@
         <p:spPr>
           <a:xfrm>
             <a:off x="1188000" y="1307520"/>
-            <a:ext cx="6425640" cy="2839680"/>
+            <a:ext cx="6425280" cy="2839320"/>
           </a:xfrm>
           <a:prstGeom prst="rect">
             <a:avLst/>
@@ -15213,7 +15189,7 @@
         <p:spPr>
           <a:xfrm>
             <a:off x="2180880" y="1828800"/>
-            <a:ext cx="4905360" cy="1523880"/>
+            <a:ext cx="4905000" cy="1523520"/>
           </a:xfrm>
           <a:prstGeom prst="rect">
             <a:avLst/>
@@ -15296,7 +15272,7 @@
         <p:spPr>
           <a:xfrm>
             <a:off x="883080" y="682920"/>
-            <a:ext cx="6425640" cy="395640"/>
+            <a:ext cx="6425280" cy="395280"/>
           </a:xfrm>
           <a:prstGeom prst="rect">
             <a:avLst/>
@@ -15349,7 +15325,7 @@
         <p:spPr>
           <a:xfrm>
             <a:off x="8403840" y="4692960"/>
-            <a:ext cx="547920" cy="299520"/>
+            <a:ext cx="547560" cy="299160"/>
           </a:xfrm>
           <a:prstGeom prst="rect">
             <a:avLst/>
@@ -15391,7 +15367,7 @@
                 <a:tab algn="l" pos="0"/>
               </a:tabLst>
             </a:pPr>
-            <a:fld id="{938176B7-0AF9-4C85-AB82-F8B46B82FC44}" type="slidenum">
+            <a:fld id="{A9429067-35C7-4EE9-BC9B-4259EAB7B491}" type="slidenum">
               <a:rPr b="1" lang="en" sz="1500" spc="-1" strike="noStrike">
                 <a:solidFill>
                   <a:srgbClr val="7f8b91"/>
@@ -15416,7 +15392,7 @@
         <p:spPr>
           <a:xfrm>
             <a:off x="7648200" y="3814560"/>
-            <a:ext cx="937080" cy="834480"/>
+            <a:ext cx="936720" cy="834120"/>
           </a:xfrm>
           <a:custGeom>
             <a:avLst/>
@@ -15814,7 +15790,7 @@
         <p:spPr>
           <a:xfrm>
             <a:off x="1188000" y="1307520"/>
-            <a:ext cx="6425640" cy="2839680"/>
+            <a:ext cx="6425280" cy="2839320"/>
           </a:xfrm>
           <a:prstGeom prst="rect">
             <a:avLst/>
@@ -15955,7 +15931,7 @@
         <p:spPr>
           <a:xfrm>
             <a:off x="883080" y="682920"/>
-            <a:ext cx="6425640" cy="395640"/>
+            <a:ext cx="6425280" cy="395280"/>
           </a:xfrm>
           <a:prstGeom prst="rect">
             <a:avLst/>
@@ -16008,7 +15984,7 @@
         <p:spPr>
           <a:xfrm>
             <a:off x="8403840" y="4692960"/>
-            <a:ext cx="547920" cy="299520"/>
+            <a:ext cx="547560" cy="299160"/>
           </a:xfrm>
           <a:prstGeom prst="rect">
             <a:avLst/>
@@ -16050,7 +16026,7 @@
                 <a:tab algn="l" pos="0"/>
               </a:tabLst>
             </a:pPr>
-            <a:fld id="{BA18D1B8-FE9C-42BB-B325-130A57644B25}" type="slidenum">
+            <a:fld id="{BEA73279-5CB9-4ACF-9FC0-7B05DF59A27B}" type="slidenum">
               <a:rPr b="1" lang="en" sz="1500" spc="-1" strike="noStrike">
                 <a:solidFill>
                   <a:srgbClr val="7f8b91"/>
@@ -16075,7 +16051,7 @@
         <p:spPr>
           <a:xfrm>
             <a:off x="7648200" y="3814560"/>
-            <a:ext cx="937080" cy="834480"/>
+            <a:ext cx="936720" cy="834120"/>
           </a:xfrm>
           <a:custGeom>
             <a:avLst/>
@@ -16473,7 +16449,7 @@
         <p:spPr>
           <a:xfrm>
             <a:off x="1188000" y="1307520"/>
-            <a:ext cx="6425640" cy="2839680"/>
+            <a:ext cx="6425280" cy="2839320"/>
           </a:xfrm>
           <a:prstGeom prst="rect">
             <a:avLst/>
@@ -16633,7 +16609,7 @@
         <p:spPr>
           <a:xfrm>
             <a:off x="883080" y="682920"/>
-            <a:ext cx="6425640" cy="395640"/>
+            <a:ext cx="6425280" cy="395280"/>
           </a:xfrm>
           <a:prstGeom prst="rect">
             <a:avLst/>
@@ -16686,7 +16662,7 @@
         <p:spPr>
           <a:xfrm>
             <a:off x="8403840" y="4692960"/>
-            <a:ext cx="547920" cy="299520"/>
+            <a:ext cx="547560" cy="299160"/>
           </a:xfrm>
           <a:prstGeom prst="rect">
             <a:avLst/>
@@ -16728,7 +16704,7 @@
                 <a:tab algn="l" pos="0"/>
               </a:tabLst>
             </a:pPr>
-            <a:fld id="{1713899D-254C-467D-8244-0FA08D2FE847}" type="slidenum">
+            <a:fld id="{D1466DE8-0D2E-41F6-95CE-266415D8B265}" type="slidenum">
               <a:rPr b="1" lang="en" sz="1500" spc="-1" strike="noStrike">
                 <a:solidFill>
                   <a:srgbClr val="7f8b91"/>
@@ -16753,7 +16729,7 @@
         <p:spPr>
           <a:xfrm>
             <a:off x="7648200" y="3814560"/>
-            <a:ext cx="937080" cy="834480"/>
+            <a:ext cx="936720" cy="834120"/>
           </a:xfrm>
           <a:custGeom>
             <a:avLst/>
@@ -17151,7 +17127,7 @@
         <p:spPr>
           <a:xfrm>
             <a:off x="1188000" y="1307520"/>
-            <a:ext cx="6425640" cy="2839680"/>
+            <a:ext cx="6425280" cy="2839320"/>
           </a:xfrm>
           <a:prstGeom prst="rect">
             <a:avLst/>
@@ -17344,7 +17320,7 @@
         <p:spPr>
           <a:xfrm>
             <a:off x="883080" y="682920"/>
-            <a:ext cx="6425640" cy="395640"/>
+            <a:ext cx="6425280" cy="395280"/>
           </a:xfrm>
           <a:prstGeom prst="rect">
             <a:avLst/>
@@ -17397,7 +17373,7 @@
         <p:spPr>
           <a:xfrm>
             <a:off x="8403840" y="4692960"/>
-            <a:ext cx="547920" cy="299520"/>
+            <a:ext cx="547560" cy="299160"/>
           </a:xfrm>
           <a:prstGeom prst="rect">
             <a:avLst/>
@@ -17439,7 +17415,7 @@
                 <a:tab algn="l" pos="0"/>
               </a:tabLst>
             </a:pPr>
-            <a:fld id="{8487F679-A1E4-411D-A63B-1426504473ED}" type="slidenum">
+            <a:fld id="{2A2E69FA-5B09-4CED-8F55-49FD9572CE3B}" type="slidenum">
               <a:rPr b="1" lang="en" sz="1500" spc="-1" strike="noStrike">
                 <a:solidFill>
                   <a:srgbClr val="7f8b91"/>
@@ -17464,7 +17440,7 @@
         <p:spPr>
           <a:xfrm>
             <a:off x="7648200" y="3814560"/>
-            <a:ext cx="937080" cy="834480"/>
+            <a:ext cx="936720" cy="834120"/>
           </a:xfrm>
           <a:custGeom>
             <a:avLst/>
@@ -17862,7 +17838,7 @@
         <p:spPr>
           <a:xfrm>
             <a:off x="1188000" y="1307520"/>
-            <a:ext cx="6425640" cy="2839680"/>
+            <a:ext cx="6425280" cy="2839320"/>
           </a:xfrm>
           <a:prstGeom prst="rect">
             <a:avLst/>
@@ -18066,7 +18042,7 @@
         <p:spPr>
           <a:xfrm>
             <a:off x="883080" y="682920"/>
-            <a:ext cx="6425640" cy="395640"/>
+            <a:ext cx="6425280" cy="395280"/>
           </a:xfrm>
           <a:prstGeom prst="rect">
             <a:avLst/>
@@ -18119,7 +18095,7 @@
         <p:spPr>
           <a:xfrm>
             <a:off x="8403840" y="4692960"/>
-            <a:ext cx="547920" cy="299520"/>
+            <a:ext cx="547560" cy="299160"/>
           </a:xfrm>
           <a:prstGeom prst="rect">
             <a:avLst/>
@@ -18161,7 +18137,7 @@
                 <a:tab algn="l" pos="0"/>
               </a:tabLst>
             </a:pPr>
-            <a:fld id="{1AAA1121-3783-492D-953E-A4FC3D71FA7F}" type="slidenum">
+            <a:fld id="{C2EB39B8-06F5-4D3E-A9B1-86058FCCCC88}" type="slidenum">
               <a:rPr b="1" lang="en" sz="1500" spc="-1" strike="noStrike">
                 <a:solidFill>
                   <a:srgbClr val="7f8b91"/>
@@ -18186,7 +18162,7 @@
         <p:spPr>
           <a:xfrm>
             <a:off x="7648200" y="3814560"/>
-            <a:ext cx="937080" cy="834480"/>
+            <a:ext cx="936720" cy="834120"/>
           </a:xfrm>
           <a:custGeom>
             <a:avLst/>
@@ -18584,7 +18560,7 @@
         <p:spPr>
           <a:xfrm>
             <a:off x="1188000" y="1307520"/>
-            <a:ext cx="6425640" cy="2839680"/>
+            <a:ext cx="6425280" cy="2839320"/>
           </a:xfrm>
           <a:prstGeom prst="rect">
             <a:avLst/>
@@ -18817,7 +18793,7 @@
         <p:spPr>
           <a:xfrm>
             <a:off x="2180880" y="1828800"/>
-            <a:ext cx="4905360" cy="1523880"/>
+            <a:ext cx="4905000" cy="1523520"/>
           </a:xfrm>
           <a:prstGeom prst="rect">
             <a:avLst/>
@@ -18913,7 +18889,7 @@
         <p:spPr>
           <a:xfrm>
             <a:off x="883080" y="682920"/>
-            <a:ext cx="6425640" cy="395640"/>
+            <a:ext cx="6425280" cy="395280"/>
           </a:xfrm>
           <a:prstGeom prst="rect">
             <a:avLst/>
@@ -18966,7 +18942,7 @@
         <p:spPr>
           <a:xfrm>
             <a:off x="8403840" y="4692960"/>
-            <a:ext cx="547920" cy="299520"/>
+            <a:ext cx="547560" cy="299160"/>
           </a:xfrm>
           <a:prstGeom prst="rect">
             <a:avLst/>
@@ -19008,7 +18984,7 @@
                 <a:tab algn="l" pos="0"/>
               </a:tabLst>
             </a:pPr>
-            <a:fld id="{E53C8217-4C4B-497C-ABC8-73081D1EA32E}" type="slidenum">
+            <a:fld id="{947CA149-1495-47C0-9AB7-757CC87FFA12}" type="slidenum">
               <a:rPr b="1" lang="en" sz="1500" spc="-1" strike="noStrike">
                 <a:solidFill>
                   <a:srgbClr val="7f8b91"/>
@@ -19033,7 +19009,7 @@
         <p:spPr>
           <a:xfrm>
             <a:off x="7648200" y="3814560"/>
-            <a:ext cx="937080" cy="834480"/>
+            <a:ext cx="936720" cy="834120"/>
           </a:xfrm>
           <a:custGeom>
             <a:avLst/>
@@ -19431,7 +19407,7 @@
         <p:spPr>
           <a:xfrm>
             <a:off x="1188000" y="1307520"/>
-            <a:ext cx="6425640" cy="2839680"/>
+            <a:ext cx="6425280" cy="2839320"/>
           </a:xfrm>
           <a:prstGeom prst="rect">
             <a:avLst/>
@@ -19591,7 +19567,7 @@
         <p:spPr>
           <a:xfrm>
             <a:off x="883080" y="682920"/>
-            <a:ext cx="6425640" cy="395640"/>
+            <a:ext cx="6425280" cy="395280"/>
           </a:xfrm>
           <a:prstGeom prst="rect">
             <a:avLst/>
@@ -19644,7 +19620,7 @@
         <p:spPr>
           <a:xfrm>
             <a:off x="1187640" y="1505880"/>
-            <a:ext cx="6425640" cy="2839680"/>
+            <a:ext cx="6425280" cy="2839320"/>
           </a:xfrm>
           <a:prstGeom prst="rect">
             <a:avLst/>
@@ -19660,6 +19636,9 @@
           </a:bodyPr>
           <a:p>
             <a:pPr marL="432000" indent="-324000">
+              <a:lnSpc>
+                <a:spcPct val="100000"/>
+              </a:lnSpc>
               <a:spcBef>
                 <a:spcPts val="1417"/>
               </a:spcBef>
@@ -19682,6 +19661,9 @@
           </a:p>
           <a:p>
             <a:pPr marL="432000" indent="-324000">
+              <a:lnSpc>
+                <a:spcPct val="100000"/>
+              </a:lnSpc>
               <a:spcBef>
                 <a:spcPts val="1417"/>
               </a:spcBef>
@@ -19717,7 +19699,7 @@
         <p:spPr>
           <a:xfrm>
             <a:off x="8403840" y="4692960"/>
-            <a:ext cx="547920" cy="299520"/>
+            <a:ext cx="547560" cy="299160"/>
           </a:xfrm>
           <a:prstGeom prst="rect">
             <a:avLst/>
@@ -19759,7 +19741,7 @@
                 <a:tab algn="l" pos="0"/>
               </a:tabLst>
             </a:pPr>
-            <a:fld id="{6151D6BA-EDE2-4421-87C3-357E34ECBC5D}" type="slidenum">
+            <a:fld id="{0B8E3012-FAAD-4012-8C13-DC8D5D59F1AE}" type="slidenum">
               <a:rPr b="1" lang="en" sz="1500" spc="-1" strike="noStrike">
                 <a:solidFill>
                   <a:srgbClr val="7f8b91"/>
@@ -19784,7 +19766,7 @@
         <p:spPr>
           <a:xfrm>
             <a:off x="7648200" y="3814560"/>
-            <a:ext cx="937080" cy="834480"/>
+            <a:ext cx="936720" cy="834120"/>
           </a:xfrm>
           <a:custGeom>
             <a:avLst/>
@@ -20212,7 +20194,7 @@
         <p:spPr>
           <a:xfrm>
             <a:off x="883080" y="682920"/>
-            <a:ext cx="6425640" cy="395640"/>
+            <a:ext cx="6425280" cy="395280"/>
           </a:xfrm>
           <a:prstGeom prst="rect">
             <a:avLst/>
@@ -20265,7 +20247,7 @@
         <p:spPr>
           <a:xfrm>
             <a:off x="1187640" y="1505880"/>
-            <a:ext cx="6425640" cy="2839680"/>
+            <a:ext cx="6425280" cy="2839320"/>
           </a:xfrm>
           <a:prstGeom prst="rect">
             <a:avLst/>
@@ -20393,7 +20375,7 @@
         <p:spPr>
           <a:xfrm>
             <a:off x="8403840" y="4692960"/>
-            <a:ext cx="547920" cy="299520"/>
+            <a:ext cx="547560" cy="299160"/>
           </a:xfrm>
           <a:prstGeom prst="rect">
             <a:avLst/>
@@ -20435,7 +20417,7 @@
                 <a:tab algn="l" pos="0"/>
               </a:tabLst>
             </a:pPr>
-            <a:fld id="{E8AB9811-BD2D-4B0D-8C0A-D42027BD4FFD}" type="slidenum">
+            <a:fld id="{F8B7B1BA-2550-419D-A477-360A7ED44277}" type="slidenum">
               <a:rPr b="1" lang="en" sz="1500" spc="-1" strike="noStrike">
                 <a:solidFill>
                   <a:srgbClr val="7f8b91"/>
@@ -20460,7 +20442,7 @@
         <p:spPr>
           <a:xfrm>
             <a:off x="7648200" y="3814560"/>
-            <a:ext cx="937080" cy="834480"/>
+            <a:ext cx="936720" cy="834120"/>
           </a:xfrm>
           <a:custGeom>
             <a:avLst/>
@@ -20888,7 +20870,7 @@
         <p:spPr>
           <a:xfrm>
             <a:off x="883080" y="682920"/>
-            <a:ext cx="6425640" cy="395640"/>
+            <a:ext cx="6425280" cy="395280"/>
           </a:xfrm>
           <a:prstGeom prst="rect">
             <a:avLst/>
@@ -20941,7 +20923,7 @@
         <p:spPr>
           <a:xfrm>
             <a:off x="1187640" y="1505880"/>
-            <a:ext cx="6425640" cy="2839680"/>
+            <a:ext cx="6425280" cy="2839320"/>
           </a:xfrm>
           <a:prstGeom prst="rect">
             <a:avLst/>
@@ -21086,7 +21068,7 @@
         <p:spPr>
           <a:xfrm>
             <a:off x="8403840" y="4692960"/>
-            <a:ext cx="547920" cy="299520"/>
+            <a:ext cx="547560" cy="299160"/>
           </a:xfrm>
           <a:prstGeom prst="rect">
             <a:avLst/>
@@ -21128,7 +21110,7 @@
                 <a:tab algn="l" pos="0"/>
               </a:tabLst>
             </a:pPr>
-            <a:fld id="{D7D67BB8-FB6C-4647-BEEB-0E641573BABB}" type="slidenum">
+            <a:fld id="{F570D5DA-17B1-4839-A5C2-3BD984E86F2C}" type="slidenum">
               <a:rPr b="1" lang="en" sz="1500" spc="-1" strike="noStrike">
                 <a:solidFill>
                   <a:srgbClr val="7f8b91"/>
@@ -21153,7 +21135,7 @@
         <p:spPr>
           <a:xfrm>
             <a:off x="7648200" y="3814560"/>
-            <a:ext cx="937080" cy="834480"/>
+            <a:ext cx="936720" cy="834120"/>
           </a:xfrm>
           <a:custGeom>
             <a:avLst/>
@@ -21581,7 +21563,7 @@
         <p:spPr>
           <a:xfrm>
             <a:off x="883080" y="682920"/>
-            <a:ext cx="6425640" cy="395640"/>
+            <a:ext cx="6425280" cy="395280"/>
           </a:xfrm>
           <a:prstGeom prst="rect">
             <a:avLst/>
@@ -21634,7 +21616,7 @@
         <p:spPr>
           <a:xfrm>
             <a:off x="1187640" y="1505880"/>
-            <a:ext cx="6425640" cy="2839680"/>
+            <a:ext cx="6425280" cy="2839320"/>
           </a:xfrm>
           <a:prstGeom prst="rect">
             <a:avLst/>
@@ -21898,7 +21880,7 @@
         <p:spPr>
           <a:xfrm>
             <a:off x="8403840" y="4692960"/>
-            <a:ext cx="547920" cy="299520"/>
+            <a:ext cx="547560" cy="299160"/>
           </a:xfrm>
           <a:prstGeom prst="rect">
             <a:avLst/>
@@ -21940,7 +21922,7 @@
                 <a:tab algn="l" pos="0"/>
               </a:tabLst>
             </a:pPr>
-            <a:fld id="{67D2B3E3-B099-4844-9514-D78DF4D4EA3A}" type="slidenum">
+            <a:fld id="{95B8E323-E3DE-41B6-ACD9-C6AC21F0182B}" type="slidenum">
               <a:rPr b="1" lang="en" sz="1500" spc="-1" strike="noStrike">
                 <a:solidFill>
                   <a:srgbClr val="7f8b91"/>
@@ -21965,7 +21947,7 @@
         <p:spPr>
           <a:xfrm>
             <a:off x="7648200" y="3814560"/>
-            <a:ext cx="937080" cy="834480"/>
+            <a:ext cx="936720" cy="834120"/>
           </a:xfrm>
           <a:custGeom>
             <a:avLst/>
@@ -22393,7 +22375,7 @@
         <p:spPr>
           <a:xfrm>
             <a:off x="883080" y="682920"/>
-            <a:ext cx="6425640" cy="395640"/>
+            <a:ext cx="6425280" cy="395280"/>
           </a:xfrm>
           <a:prstGeom prst="rect">
             <a:avLst/>
@@ -22446,7 +22428,7 @@
         <p:spPr>
           <a:xfrm>
             <a:off x="1187640" y="1505880"/>
-            <a:ext cx="6425640" cy="2839680"/>
+            <a:ext cx="6425280" cy="2839320"/>
           </a:xfrm>
           <a:prstGeom prst="rect">
             <a:avLst/>
@@ -22591,7 +22573,7 @@
         <p:spPr>
           <a:xfrm>
             <a:off x="8403840" y="4692960"/>
-            <a:ext cx="547920" cy="299520"/>
+            <a:ext cx="547560" cy="299160"/>
           </a:xfrm>
           <a:prstGeom prst="rect">
             <a:avLst/>
@@ -22633,7 +22615,7 @@
                 <a:tab algn="l" pos="0"/>
               </a:tabLst>
             </a:pPr>
-            <a:fld id="{C9F42D8B-5451-43C4-B2BA-D133CD541AC8}" type="slidenum">
+            <a:fld id="{B295870C-2EFB-43B8-9573-72B86CABB542}" type="slidenum">
               <a:rPr b="1" lang="en" sz="1500" spc="-1" strike="noStrike">
                 <a:solidFill>
                   <a:srgbClr val="7f8b91"/>
@@ -22658,7 +22640,7 @@
         <p:spPr>
           <a:xfrm>
             <a:off x="7648200" y="3814560"/>
-            <a:ext cx="937080" cy="834480"/>
+            <a:ext cx="936720" cy="834120"/>
           </a:xfrm>
           <a:custGeom>
             <a:avLst/>
@@ -23086,7 +23068,7 @@
         <p:spPr>
           <a:xfrm>
             <a:off x="883080" y="682920"/>
-            <a:ext cx="6425640" cy="395640"/>
+            <a:ext cx="6425280" cy="395280"/>
           </a:xfrm>
           <a:prstGeom prst="rect">
             <a:avLst/>
@@ -23139,7 +23121,7 @@
         <p:spPr>
           <a:xfrm>
             <a:off x="1187640" y="1505880"/>
-            <a:ext cx="6425640" cy="2839680"/>
+            <a:ext cx="6425280" cy="2839320"/>
           </a:xfrm>
           <a:prstGeom prst="rect">
             <a:avLst/>
@@ -23239,7 +23221,7 @@
         <p:spPr>
           <a:xfrm>
             <a:off x="8403840" y="4692960"/>
-            <a:ext cx="547920" cy="299520"/>
+            <a:ext cx="547560" cy="299160"/>
           </a:xfrm>
           <a:prstGeom prst="rect">
             <a:avLst/>
@@ -23281,7 +23263,7 @@
                 <a:tab algn="l" pos="0"/>
               </a:tabLst>
             </a:pPr>
-            <a:fld id="{2655EEF2-440E-4503-BECF-B3B8D11758C2}" type="slidenum">
+            <a:fld id="{721FE4D9-42CB-4E86-B49E-B66BC0A7E297}" type="slidenum">
               <a:rPr b="1" lang="en" sz="1500" spc="-1" strike="noStrike">
                 <a:solidFill>
                   <a:srgbClr val="7f8b91"/>
@@ -23306,7 +23288,7 @@
         <p:spPr>
           <a:xfrm>
             <a:off x="7648200" y="3814560"/>
-            <a:ext cx="937080" cy="834480"/>
+            <a:ext cx="936720" cy="834120"/>
           </a:xfrm>
           <a:custGeom>
             <a:avLst/>
@@ -23734,7 +23716,7 @@
         <p:spPr>
           <a:xfrm>
             <a:off x="883080" y="682920"/>
-            <a:ext cx="6425640" cy="395640"/>
+            <a:ext cx="6425280" cy="395280"/>
           </a:xfrm>
           <a:prstGeom prst="rect">
             <a:avLst/>
@@ -23787,7 +23769,7 @@
         <p:spPr>
           <a:xfrm>
             <a:off x="8403840" y="4692960"/>
-            <a:ext cx="547920" cy="299520"/>
+            <a:ext cx="547560" cy="299160"/>
           </a:xfrm>
           <a:prstGeom prst="rect">
             <a:avLst/>
@@ -23829,7 +23811,7 @@
                 <a:tab algn="l" pos="0"/>
               </a:tabLst>
             </a:pPr>
-            <a:fld id="{B14672E3-330A-4A37-BAD0-1F955699D5CA}" type="slidenum">
+            <a:fld id="{2FD13CBD-1764-4254-A66C-3C153DD6DD42}" type="slidenum">
               <a:rPr b="1" lang="en" sz="1500" spc="-1" strike="noStrike">
                 <a:solidFill>
                   <a:srgbClr val="7f8b91"/>
@@ -23854,7 +23836,7 @@
         <p:spPr>
           <a:xfrm>
             <a:off x="7648200" y="3814560"/>
-            <a:ext cx="937080" cy="834480"/>
+            <a:ext cx="936720" cy="834120"/>
           </a:xfrm>
           <a:custGeom>
             <a:avLst/>
@@ -24252,7 +24234,7 @@
         <p:spPr>
           <a:xfrm>
             <a:off x="1188000" y="1505880"/>
-            <a:ext cx="6425640" cy="2839680"/>
+            <a:ext cx="6425280" cy="2839320"/>
           </a:xfrm>
           <a:prstGeom prst="rect">
             <a:avLst/>
